--- a/lecons/F5/24_F5_M1_L21_Development_of_Tourism_in_Cameroon.pptx
+++ b/lecons/F5/24_F5_M1_L21_Development_of_Tourism_in_Cameroon.pptx
@@ -13345,7 +13345,7 @@
         <p:spPr>
           <a:xfrm>
             <a:off x="0" y="658368"/>
-            <a:ext cx="3840480" cy="5833872"/>
+            <a:ext cx="5120640" cy="5833872"/>
           </a:xfrm>
           <a:prstGeom prst="rect">
             <a:avLst/>
@@ -13360,8 +13360,8 @@
         </p:nvSpPr>
         <p:spPr>
           <a:xfrm>
-            <a:off x="4069080" y="1005840"/>
-            <a:ext cx="7802575" cy="731520"/>
+            <a:off x="5349240" y="1005840"/>
+            <a:ext cx="6522415" cy="731520"/>
           </a:xfrm>
           <a:prstGeom prst="rect">
             <a:avLst/>
@@ -13401,8 +13401,8 @@
         </p:nvSpPr>
         <p:spPr>
           <a:xfrm>
-            <a:off x="4069080" y="1783080"/>
-            <a:ext cx="7802575" cy="4663440"/>
+            <a:off x="5349240" y="1783080"/>
+            <a:ext cx="6522415" cy="4663440"/>
           </a:xfrm>
           <a:prstGeom prst="rect">
             <a:avLst/>
@@ -13421,7 +13421,7 @@
               <a:buNone/>
             </a:pPr>
             <a:r>
-              <a:rPr lang="en-US" sz="4000" b="1" dirty="0">
+              <a:rPr lang="en-US" sz="3200" b="1" dirty="0">
                 <a:solidFill>
                   <a:srgbClr val="111111"/>
                 </a:solidFill>
@@ -13431,7 +13431,7 @@
               </a:rPr>
               <a:t>Topic: Managing Resources for Development through Economic Activities</a:t>
             </a:r>
-            <a:endParaRPr lang="en-US" sz="4000" dirty="0"/>
+            <a:endParaRPr lang="en-US" sz="3200" dirty="0"/>
           </a:p>
           <a:p>
             <a:pPr algn="l" indent="0" marL="0">
@@ -13441,7 +13441,7 @@
               <a:buNone/>
             </a:pPr>
             <a:r>
-              <a:rPr lang="en-US" sz="4000" b="1" dirty="0">
+              <a:rPr lang="en-US" sz="3200" b="1" dirty="0">
                 <a:solidFill>
                   <a:srgbClr val="111111"/>
                 </a:solidFill>
@@ -13451,7 +13451,7 @@
               </a:rPr>
               <a:t>Sub-topic: Economic Development Potentials of Cameroon</a:t>
             </a:r>
-            <a:endParaRPr lang="en-US" sz="4000" dirty="0"/>
+            <a:endParaRPr lang="en-US" sz="3200" dirty="0"/>
           </a:p>
           <a:p>
             <a:pPr algn="l" indent="0" marL="0">
@@ -13461,7 +13461,7 @@
               <a:buNone/>
             </a:pPr>
             <a:r>
-              <a:rPr lang="en-US" sz="4000" b="1" dirty="0">
+              <a:rPr lang="en-US" sz="3200" b="1" dirty="0">
                 <a:solidFill>
                   <a:srgbClr val="990011"/>
                 </a:solidFill>
@@ -13471,7 +13471,7 @@
               </a:rPr>
               <a:t>Lesson 21: Development of Tourism in Cameroon</a:t>
             </a:r>
-            <a:endParaRPr lang="en-US" sz="4000" dirty="0"/>
+            <a:endParaRPr lang="en-US" sz="3200" dirty="0"/>
           </a:p>
         </p:txBody>
       </p:sp>

--- a/lecons/F5/24_F5_M1_L21_Development_of_Tourism_in_Cameroon.pptx
+++ b/lecons/F5/24_F5_M1_L21_Development_of_Tourism_in_Cameroon.pptx
@@ -58,9 +58,11 @@
     <p:sldId id="306" r:id="rId52"/>
     <p:sldId id="307" r:id="rId53"/>
     <p:sldId id="308" r:id="rId54"/>
+    <p:sldId id="309" r:id="rId55"/>
+    <p:sldId id="310" r:id="rId56"/>
   </p:sldIdLst>
   <p:notesMasterIdLst>
-    <p:notesMasterId r:id="rId55"/>
+    <p:notesMasterId r:id="rId57"/>
   </p:notesMasterIdLst>
   <p:sldSz cx="12192000" cy="6858000"/>
   <p:notesSz cx="6858000" cy="12192000"/>
@@ -3282,7 +3284,7 @@
           <a:p>
             <a:r>
               <a:rPr lang="en-US" dirty="0"/>
-              <a:t>Let us copy Problems and Effects of Tourism. Tourism in Cameroon faces the following problems and effects. On this slide we have Problems and Effects on the economy. Write each point on a new line, with the key term first, and explain it in your own words when we revise. When you finish, we go to the next slide.</a:t>
+              <a:t>Let us copy Problems. Tourism in Cameroon faces the following problems. On this slide we have Bad roads and Insecurity. Write each point on a new line, with the key term first, and explain it in your own words when we revise. When you finish, we go to the next slide.</a:t>
             </a:r>
             <a:endParaRPr lang="en-US" dirty="0"/>
           </a:p>
@@ -3370,7 +3372,7 @@
           <a:p>
             <a:r>
               <a:rPr lang="en-US" dirty="0"/>
-              <a:t>We continue with Problems and Effects of Tourism. On this slide we have Effects on the people and environment. Write each point on a new line, with the key term first, and explain it in your own words when we revise.</a:t>
+              <a:t>We continue with Problems. On this slide we have Poor hotels and Harassment and weak advertising. Write each point on a new line, with the key term first, and explain it in your own words when we revise.</a:t>
             </a:r>
             <a:endParaRPr lang="en-US" dirty="0"/>
           </a:p>
@@ -3546,7 +3548,7 @@
           <a:p>
             <a:r>
               <a:rPr lang="en-US" dirty="0"/>
-              <a:t>Let us copy Government Efforts to Promote Tourism. The government promotes tourism in the following ways. On this slide we have Protection of sites and Infrastructure. Write each point on a new line, with the key term first, and explain it in your own words when we revise. When you finish, we go to the next slide.</a:t>
+              <a:t>Let us copy Effects. Tourism in Cameroon has the following effects. On this slide we have On the economy and On the people. Write each point on a new line, with the key term first, and explain it in your own words when we revise. When you finish, we go to the next slide.</a:t>
             </a:r>
             <a:endParaRPr lang="en-US" dirty="0"/>
           </a:p>
@@ -3634,7 +3636,7 @@
           <a:p>
             <a:r>
               <a:rPr lang="en-US" dirty="0"/>
-              <a:t>We continue with Government Efforts to Promote Tourism. On this slide we have Training and promotion. Write each point on a new line, with the key term first, and explain it in your own words when we revise.</a:t>
+              <a:t>We continue with Effects. On this slide we have On the environment. Write each point on a new line, with the key term first, and explain it in your own words when we revise.</a:t>
             </a:r>
             <a:endParaRPr lang="en-US" dirty="0"/>
           </a:p>
@@ -3722,7 +3724,7 @@
           <a:p>
             <a:r>
               <a:rPr lang="en-US" dirty="0"/>
-              <a:t>Now let us check what you have understood. Question 1: Name and locate two tourist attractions in Cameroon. Answer in your exercise book.</a:t>
+              <a:t>Let us copy Government Efforts to Promote Tourism. The government promotes tourism in the following ways. On this slide we have Protection of sites and Infrastructure. Write each point on a new line, with the key term first, and explain it in your own words when we revise. When you finish, we go to the next slide.</a:t>
             </a:r>
             <a:endParaRPr lang="en-US" dirty="0"/>
           </a:p>
@@ -3810,7 +3812,7 @@
           <a:p>
             <a:r>
               <a:rPr lang="en-US" dirty="0"/>
-              <a:t>The expected answer is: waza Park (Far North) and Kribi beaches (South). If you got it right, well done.</a:t>
+              <a:t>We continue with Government Efforts to Promote Tourism. On this slide we have Training and promotion. Write each point on a new line, with the key term first, and explain it in your own words when we revise.</a:t>
             </a:r>
             <a:endParaRPr lang="en-US" dirty="0"/>
           </a:p>
@@ -3898,7 +3900,7 @@
           <a:p>
             <a:r>
               <a:rPr lang="en-US" dirty="0"/>
-              <a:t>Now let us check what you have understood. Question 2: Give two problems of tourism in Cameroon. Answer in your exercise book.</a:t>
+              <a:t>Now let us check what you have understood. Question 1: Name and locate two tourist attractions in Cameroon. Answer in your exercise book.</a:t>
             </a:r>
             <a:endParaRPr lang="en-US" dirty="0"/>
           </a:p>
@@ -3986,7 +3988,7 @@
           <a:p>
             <a:r>
               <a:rPr lang="en-US" dirty="0"/>
-              <a:t>The expected answer is: bad roads and insecurity. If you got it right, well done.</a:t>
+              <a:t>The expected answer is: waza Park (Far North) and Kribi beaches (South). If you got it right, well done.</a:t>
             </a:r>
             <a:endParaRPr lang="en-US" dirty="0"/>
           </a:p>
@@ -4074,7 +4076,7 @@
           <a:p>
             <a:r>
               <a:rPr lang="en-US" dirty="0"/>
-              <a:t>For those who need more practice, fill in the blanks in your exercise book. The answers are: number 1, miniature; number 2, Foumban; number 3, Kribi.</a:t>
+              <a:t>Now let us check what you have understood. Question 2: Give two problems of tourism in Cameroon. Answer in your exercise book.</a:t>
             </a:r>
             <a:endParaRPr lang="en-US" dirty="0"/>
           </a:p>
@@ -4162,7 +4164,7 @@
           <a:p>
             <a:r>
               <a:rPr lang="en-US" dirty="0"/>
-              <a:t>For your homework: Draw a sketch map of Cameroon showing six tourist attractions. We shall correct it at the beginning of our next lesson.</a:t>
+              <a:t>The expected answer is: bad roads and insecurity. If you got it right, well done.</a:t>
             </a:r>
             <a:endParaRPr lang="en-US" dirty="0"/>
           </a:p>
@@ -4250,7 +4252,7 @@
           <a:p>
             <a:r>
               <a:rPr lang="en-US" dirty="0"/>
-              <a:t>Our next lesson will be on Lesson 22: Economic Growth of Cameroon. Thank you for your attention, and see you next time.</a:t>
+              <a:t>For those who need more practice, fill in the blanks in your exercise book. The answers are: number 1, miniature; number 2, Foumban; number 3, Kribi.</a:t>
             </a:r>
             <a:endParaRPr lang="en-US" dirty="0"/>
           </a:p>
@@ -4338,7 +4340,7 @@
           <a:p>
             <a:r>
               <a:rPr lang="en-US" dirty="0"/>
-              <a:t>Let us play the bilingual game. I say a word in English, and you give me the French word. Then we do the reverse.</a:t>
+              <a:t>For your homework: Draw a sketch map of Cameroon showing six tourist attractions. We shall correct it at the beginning of our next lesson.</a:t>
             </a:r>
             <a:endParaRPr lang="en-US" dirty="0"/>
           </a:p>
@@ -4514,7 +4516,7 @@
           <a:p>
             <a:r>
               <a:rPr lang="en-US" dirty="0"/>
-              <a:t>I record this information in the official logbook of the class after the lesson.</a:t>
+              <a:t>Our next lesson will be on Lesson 22: Economic Growth of Cameroon. Thank you for your attention, and see you next time.</a:t>
             </a:r>
             <a:endParaRPr lang="en-US" dirty="0"/>
           </a:p>
@@ -4602,7 +4604,7 @@
           <a:p>
             <a:r>
               <a:rPr lang="en-US" dirty="0"/>
-              <a:t>I complete the second page of the logbook: the matter taught, the evaluation, the homework and the attendance.</a:t>
+              <a:t>Let us play the bilingual game. I say a word in English, and you give me the French word. Then we do the reverse.</a:t>
             </a:r>
             <a:endParaRPr lang="en-US" dirty="0"/>
           </a:p>
@@ -4690,7 +4692,7 @@
           <a:p>
             <a:r>
               <a:rPr lang="en-US" dirty="0"/>
-              <a:t>This slide is for me, the teacher: it gives the timing of the lesson and what to do if the projector is not available.</a:t>
+              <a:t>I record this information in the official logbook of the class after the lesson.</a:t>
             </a:r>
             <a:endParaRPr lang="en-US" dirty="0"/>
           </a:p>
@@ -4778,7 +4780,7 @@
           <a:p>
             <a:r>
               <a:rPr lang="en-US" dirty="0"/>
-              <a:t>These are the references and picture credits used to prepare this lesson.</a:t>
+              <a:t>I complete the second page of the logbook: the matter taught, the evaluation, the homework and the attendance.</a:t>
             </a:r>
             <a:endParaRPr lang="en-US" dirty="0"/>
           </a:p>
@@ -4802,6 +4804,182 @@
             <a:fld id="{F7021451-1387-4CA6-816F-3879F97B5CBC}" type="slidenum">
               <a:rPr lang="en-US"/>
               <a:t>53</a:t>
+            </a:fld>
+            <a:endParaRPr lang="en-US"/>
+          </a:p>
+        </p:txBody>
+      </p:sp>
+    </p:spTree>
+    <p:extLst>
+      <p:ext uri="{BB962C8B-B14F-4D97-AF65-F5344CB8AC3E}">
+        <p14:creationId xmlns:p14="http://schemas.microsoft.com/office/powerpoint/2010/main" val="1024086991"/>
+      </p:ext>
+    </p:extLst>
+  </p:cSld>
+  <p:clrMapOvr>
+    <a:masterClrMapping/>
+  </p:clrMapOvr>
+</p:notes>
+</file>
+
+<file path=ppt/notesSlides/notesSlide54.xml><?xml version="1.0" encoding="utf-8"?>
+<p:notes xmlns:a="http://schemas.openxmlformats.org/drawingml/2006/main" xmlns:r="http://schemas.openxmlformats.org/officeDocument/2006/relationships" xmlns:p="http://schemas.openxmlformats.org/presentationml/2006/main">
+  <p:cSld>
+    <p:spTree>
+      <p:nvGrpSpPr>
+        <p:cNvPr id="1" name=""/>
+        <p:cNvGrpSpPr/>
+        <p:nvPr/>
+      </p:nvGrpSpPr>
+      <p:grpSpPr>
+        <a:xfrm>
+          <a:off x="0" y="0"/>
+          <a:ext cx="0" cy="0"/>
+          <a:chOff x="0" y="0"/>
+          <a:chExt cx="0" cy="0"/>
+        </a:xfrm>
+      </p:grpSpPr>
+      <p:sp>
+        <p:nvSpPr>
+          <p:cNvPr id="2" name="Slide Image Placeholder 1"/>
+          <p:cNvSpPr>
+            <a:spLocks noGrp="1" noRot="1" noChangeAspect="1"/>
+          </p:cNvSpPr>
+          <p:nvPr>
+            <p:ph type="sldImg"/>
+          </p:nvPr>
+        </p:nvSpPr>
+        <p:spPr/>
+      </p:sp>
+      <p:sp>
+        <p:nvSpPr>
+          <p:cNvPr id="3" name="Notes Placeholder 2"/>
+          <p:cNvSpPr>
+            <a:spLocks noGrp="1"/>
+          </p:cNvSpPr>
+          <p:nvPr>
+            <p:ph type="body" idx="1"/>
+          </p:nvPr>
+        </p:nvSpPr>
+        <p:spPr/>
+        <p:txBody>
+          <a:bodyPr/>
+          <a:lstStyle/>
+          <a:p>
+            <a:r>
+              <a:rPr lang="en-US" dirty="0"/>
+              <a:t>This slide is for me, the teacher: it gives the timing of the lesson and what to do if the projector is not available.</a:t>
+            </a:r>
+            <a:endParaRPr lang="en-US" dirty="0"/>
+          </a:p>
+        </p:txBody>
+      </p:sp>
+      <p:sp>
+        <p:nvSpPr>
+          <p:cNvPr id="4" name="Slide Number Placeholder 3"/>
+          <p:cNvSpPr>
+            <a:spLocks noGrp="1"/>
+          </p:cNvSpPr>
+          <p:nvPr>
+            <p:ph type="sldNum" sz="quarter" idx="10"/>
+          </p:nvPr>
+        </p:nvSpPr>
+        <p:spPr/>
+        <p:txBody>
+          <a:bodyPr/>
+          <a:lstStyle/>
+          <a:p>
+            <a:fld id="{F7021451-1387-4CA6-816F-3879F97B5CBC}" type="slidenum">
+              <a:rPr lang="en-US"/>
+              <a:t>54</a:t>
+            </a:fld>
+            <a:endParaRPr lang="en-US"/>
+          </a:p>
+        </p:txBody>
+      </p:sp>
+    </p:spTree>
+    <p:extLst>
+      <p:ext uri="{BB962C8B-B14F-4D97-AF65-F5344CB8AC3E}">
+        <p14:creationId xmlns:p14="http://schemas.microsoft.com/office/powerpoint/2010/main" val="1024086991"/>
+      </p:ext>
+    </p:extLst>
+  </p:cSld>
+  <p:clrMapOvr>
+    <a:masterClrMapping/>
+  </p:clrMapOvr>
+</p:notes>
+</file>
+
+<file path=ppt/notesSlides/notesSlide55.xml><?xml version="1.0" encoding="utf-8"?>
+<p:notes xmlns:a="http://schemas.openxmlformats.org/drawingml/2006/main" xmlns:r="http://schemas.openxmlformats.org/officeDocument/2006/relationships" xmlns:p="http://schemas.openxmlformats.org/presentationml/2006/main">
+  <p:cSld>
+    <p:spTree>
+      <p:nvGrpSpPr>
+        <p:cNvPr id="1" name=""/>
+        <p:cNvGrpSpPr/>
+        <p:nvPr/>
+      </p:nvGrpSpPr>
+      <p:grpSpPr>
+        <a:xfrm>
+          <a:off x="0" y="0"/>
+          <a:ext cx="0" cy="0"/>
+          <a:chOff x="0" y="0"/>
+          <a:chExt cx="0" cy="0"/>
+        </a:xfrm>
+      </p:grpSpPr>
+      <p:sp>
+        <p:nvSpPr>
+          <p:cNvPr id="2" name="Slide Image Placeholder 1"/>
+          <p:cNvSpPr>
+            <a:spLocks noGrp="1" noRot="1" noChangeAspect="1"/>
+          </p:cNvSpPr>
+          <p:nvPr>
+            <p:ph type="sldImg"/>
+          </p:nvPr>
+        </p:nvSpPr>
+        <p:spPr/>
+      </p:sp>
+      <p:sp>
+        <p:nvSpPr>
+          <p:cNvPr id="3" name="Notes Placeholder 2"/>
+          <p:cNvSpPr>
+            <a:spLocks noGrp="1"/>
+          </p:cNvSpPr>
+          <p:nvPr>
+            <p:ph type="body" idx="1"/>
+          </p:nvPr>
+        </p:nvSpPr>
+        <p:spPr/>
+        <p:txBody>
+          <a:bodyPr/>
+          <a:lstStyle/>
+          <a:p>
+            <a:r>
+              <a:rPr lang="en-US" dirty="0"/>
+              <a:t>These are the references and picture credits used to prepare this lesson.</a:t>
+            </a:r>
+            <a:endParaRPr lang="en-US" dirty="0"/>
+          </a:p>
+        </p:txBody>
+      </p:sp>
+      <p:sp>
+        <p:nvSpPr>
+          <p:cNvPr id="4" name="Slide Number Placeholder 3"/>
+          <p:cNvSpPr>
+            <a:spLocks noGrp="1"/>
+          </p:cNvSpPr>
+          <p:nvPr>
+            <p:ph type="sldNum" sz="quarter" idx="10"/>
+          </p:nvPr>
+        </p:nvSpPr>
+        <p:spPr/>
+        <p:txBody>
+          <a:bodyPr/>
+          <a:lstStyle/>
+          <a:p>
+            <a:fld id="{F7021451-1387-4CA6-816F-3879F97B5CBC}" type="slidenum">
+              <a:rPr lang="en-US"/>
+              <a:t>55</a:t>
             </a:fld>
             <a:endParaRPr lang="en-US"/>
           </a:p>
@@ -14384,7 +14562,7 @@
         <p:spPr>
           <a:xfrm>
             <a:off x="0" y="658368"/>
-            <a:ext cx="3840480" cy="5833872"/>
+            <a:ext cx="5120640" cy="5833872"/>
           </a:xfrm>
           <a:prstGeom prst="rect">
             <a:avLst/>
@@ -14399,8 +14577,8 @@
         </p:nvSpPr>
         <p:spPr>
           <a:xfrm>
-            <a:off x="4069080" y="1005840"/>
-            <a:ext cx="7802575" cy="731520"/>
+            <a:off x="5349240" y="1005840"/>
+            <a:ext cx="6522415" cy="731520"/>
           </a:xfrm>
           <a:prstGeom prst="rect">
             <a:avLst/>
@@ -14440,8 +14618,47 @@
         </p:nvSpPr>
         <p:spPr>
           <a:xfrm>
-            <a:off x="4069080" y="1783080"/>
-            <a:ext cx="7802575" cy="4663440"/>
+            <a:off x="5349240" y="1737360"/>
+            <a:ext cx="6522415" cy="457200"/>
+          </a:xfrm>
+          <a:prstGeom prst="rect">
+            <a:avLst/>
+          </a:prstGeom>
+          <a:noFill/>
+          <a:ln/>
+        </p:spPr>
+        <p:txBody>
+          <a:bodyPr wrap="square" lIns="0" tIns="0" rIns="0" bIns="0" rtlCol="0" anchor="ctr"/>
+          <a:lstStyle/>
+          <a:p>
+            <a:pPr algn="l" indent="0" marL="0">
+              <a:buNone/>
+            </a:pPr>
+            <a:r>
+              <a:rPr lang="en-US" sz="3200" b="1" dirty="0">
+                <a:solidFill>
+                  <a:srgbClr val="990011"/>
+                </a:solidFill>
+                <a:latin typeface="Times New Roman" pitchFamily="34" charset="0"/>
+                <a:ea typeface="Times New Roman" pitchFamily="34" charset="-122"/>
+                <a:cs typeface="Times New Roman" pitchFamily="34" charset="-120"/>
+              </a:rPr>
+              <a:t>A) Problems</a:t>
+            </a:r>
+            <a:endParaRPr lang="en-US" sz="3200" dirty="0"/>
+          </a:p>
+        </p:txBody>
+      </p:sp>
+      <p:sp>
+        <p:nvSpPr>
+          <p:cNvPr id="6" name="Text 3"/>
+          <p:cNvSpPr/>
+          <p:nvPr/>
+        </p:nvSpPr>
+        <p:spPr>
+          <a:xfrm>
+            <a:off x="5349240" y="2240280"/>
+            <a:ext cx="6522415" cy="4206240"/>
           </a:xfrm>
           <a:prstGeom prst="rect">
             <a:avLst/>
@@ -14468,7 +14685,7 @@
                 <a:ea typeface="Times New Roman" pitchFamily="34" charset="-122"/>
                 <a:cs typeface="Times New Roman" pitchFamily="34" charset="-120"/>
               </a:rPr>
-              <a:t>Tourism in Cameroon faces the following problems and effects:</a:t>
+              <a:t>Tourism in Cameroon faces the following problems:</a:t>
             </a:r>
             <a:endParaRPr lang="en-US" sz="4000" dirty="0"/>
           </a:p>
@@ -14488,7 +14705,7 @@
                 <a:ea typeface="Times New Roman" pitchFamily="34" charset="-122"/>
                 <a:cs typeface="Times New Roman" pitchFamily="34" charset="-120"/>
               </a:rPr>
-              <a:t>Problems: </a:t>
+              <a:t>Bad roads: </a:t>
             </a:r>
             <a:pPr algn="l" indent="0" marL="0">
               <a:spcAft>
@@ -14505,7 +14722,7 @@
                 <a:ea typeface="Times New Roman" pitchFamily="34" charset="-122"/>
                 <a:cs typeface="Times New Roman" pitchFamily="34" charset="-120"/>
               </a:rPr>
-              <a:t>Bad roads, insecurity, poor hotels, harassment and weak advertising limit tourism.</a:t>
+              <a:t>Many sites are hard to reach.</a:t>
             </a:r>
             <a:endParaRPr lang="en-US" sz="4000" dirty="0"/>
           </a:p>
@@ -14525,7 +14742,7 @@
                 <a:ea typeface="Times New Roman" pitchFamily="34" charset="-122"/>
                 <a:cs typeface="Times New Roman" pitchFamily="34" charset="-120"/>
               </a:rPr>
-              <a:t>Effects on the economy: </a:t>
+              <a:t>Insecurity: </a:t>
             </a:r>
             <a:pPr algn="l" indent="0" marL="0">
               <a:spcAft>
@@ -14542,7 +14759,7 @@
                 <a:ea typeface="Times New Roman" pitchFamily="34" charset="-122"/>
                 <a:cs typeface="Times New Roman" pitchFamily="34" charset="-120"/>
               </a:rPr>
-              <a:t>Tourism brings foreign currency and jobs.</a:t>
+              <a:t>Some regions are dangerous for visitors.</a:t>
             </a:r>
             <a:endParaRPr lang="en-US" sz="4000" dirty="0"/>
           </a:p>
@@ -14677,7 +14894,7 @@
         <p:spPr>
           <a:xfrm>
             <a:off x="0" y="658368"/>
-            <a:ext cx="5120640" cy="5833872"/>
+            <a:ext cx="3840480" cy="5833872"/>
           </a:xfrm>
           <a:prstGeom prst="rect">
             <a:avLst/>
@@ -14692,8 +14909,8 @@
         </p:nvSpPr>
         <p:spPr>
           <a:xfrm>
-            <a:off x="5349240" y="1005840"/>
-            <a:ext cx="6522415" cy="731520"/>
+            <a:off x="4069080" y="1005840"/>
+            <a:ext cx="7802575" cy="731520"/>
           </a:xfrm>
           <a:prstGeom prst="rect">
             <a:avLst/>
@@ -14719,7 +14936,7 @@
                 <a:ea typeface="Times New Roman" pitchFamily="34" charset="-122"/>
                 <a:cs typeface="Times New Roman" pitchFamily="34" charset="-120"/>
               </a:rPr>
-              <a:t>2. Problems and Effects of Tourism (continued)</a:t>
+              <a:t>2. Problems and Effects of Tourism</a:t>
             </a:r>
             <a:endParaRPr lang="en-US" sz="3600" dirty="0"/>
           </a:p>
@@ -14733,8 +14950,47 @@
         </p:nvSpPr>
         <p:spPr>
           <a:xfrm>
-            <a:off x="5349240" y="1783080"/>
-            <a:ext cx="6522415" cy="4663440"/>
+            <a:off x="4069080" y="1737360"/>
+            <a:ext cx="7802575" cy="457200"/>
+          </a:xfrm>
+          <a:prstGeom prst="rect">
+            <a:avLst/>
+          </a:prstGeom>
+          <a:noFill/>
+          <a:ln/>
+        </p:spPr>
+        <p:txBody>
+          <a:bodyPr wrap="square" lIns="0" tIns="0" rIns="0" bIns="0" rtlCol="0" anchor="ctr"/>
+          <a:lstStyle/>
+          <a:p>
+            <a:pPr algn="l" indent="0" marL="0">
+              <a:buNone/>
+            </a:pPr>
+            <a:r>
+              <a:rPr lang="en-US" sz="3200" b="1" dirty="0">
+                <a:solidFill>
+                  <a:srgbClr val="990011"/>
+                </a:solidFill>
+                <a:latin typeface="Times New Roman" pitchFamily="34" charset="0"/>
+                <a:ea typeface="Times New Roman" pitchFamily="34" charset="-122"/>
+                <a:cs typeface="Times New Roman" pitchFamily="34" charset="-120"/>
+              </a:rPr>
+              <a:t>A) Problems (continued)</a:t>
+            </a:r>
+            <a:endParaRPr lang="en-US" sz="3200" dirty="0"/>
+          </a:p>
+        </p:txBody>
+      </p:sp>
+      <p:sp>
+        <p:nvSpPr>
+          <p:cNvPr id="6" name="Text 3"/>
+          <p:cNvSpPr/>
+          <p:nvPr/>
+        </p:nvSpPr>
+        <p:spPr>
+          <a:xfrm>
+            <a:off x="4069080" y="2240280"/>
+            <a:ext cx="7802575" cy="4206240"/>
           </a:xfrm>
           <a:prstGeom prst="rect">
             <a:avLst/>
@@ -14761,7 +15017,7 @@
                 <a:ea typeface="Times New Roman" pitchFamily="34" charset="-122"/>
                 <a:cs typeface="Times New Roman" pitchFamily="34" charset="-120"/>
               </a:rPr>
-              <a:t>Effects on the people and environment: </a:t>
+              <a:t>Poor hotels: </a:t>
             </a:r>
             <a:pPr algn="l" indent="0" marL="0">
               <a:spcAft>
@@ -14778,7 +15034,44 @@
                 <a:ea typeface="Times New Roman" pitchFamily="34" charset="-122"/>
                 <a:cs typeface="Times New Roman" pitchFamily="34" charset="-120"/>
               </a:rPr>
-              <a:t>It promotes local crafts but can pollute sites and change cultures.</a:t>
+              <a:t>There are few good hotels outside the big towns.</a:t>
+            </a:r>
+            <a:endParaRPr lang="en-US" sz="4000" dirty="0"/>
+          </a:p>
+          <a:p>
+            <a:pPr algn="l" indent="0" marL="0">
+              <a:spcAft>
+                <a:spcPts val="800"/>
+              </a:spcAft>
+              <a:buNone/>
+            </a:pPr>
+            <a:r>
+              <a:rPr lang="en-US" sz="4000" b="1" dirty="0">
+                <a:solidFill>
+                  <a:srgbClr val="111111"/>
+                </a:solidFill>
+                <a:latin typeface="Times New Roman" pitchFamily="34" charset="0"/>
+                <a:ea typeface="Times New Roman" pitchFamily="34" charset="-122"/>
+                <a:cs typeface="Times New Roman" pitchFamily="34" charset="-120"/>
+              </a:rPr>
+              <a:t>Harassment and weak advertising: </a:t>
+            </a:r>
+            <a:pPr algn="l" indent="0" marL="0">
+              <a:spcAft>
+                <a:spcPts val="800"/>
+              </a:spcAft>
+              <a:buNone/>
+            </a:pPr>
+            <a:r>
+              <a:rPr lang="en-US" sz="4000" dirty="0">
+                <a:solidFill>
+                  <a:srgbClr val="111111"/>
+                </a:solidFill>
+                <a:latin typeface="Times New Roman" pitchFamily="34" charset="0"/>
+                <a:ea typeface="Times New Roman" pitchFamily="34" charset="-122"/>
+                <a:cs typeface="Times New Roman" pitchFamily="34" charset="-120"/>
+              </a:rPr>
+              <a:t>Tourists are disturbed, and Cameroon is little known abroad.</a:t>
             </a:r>
             <a:endParaRPr lang="en-US" sz="4000" dirty="0"/>
           </a:p>
@@ -15194,7 +15487,7 @@
                 <a:ea typeface="Times New Roman" pitchFamily="34" charset="-122"/>
                 <a:cs typeface="Times New Roman" pitchFamily="34" charset="-120"/>
               </a:rPr>
-              <a:t>3. Government Efforts to Promote Tourism</a:t>
+              <a:t>2. Problems and Effects of Tourism</a:t>
             </a:r>
             <a:endParaRPr lang="en-US" sz="3600" dirty="0"/>
           </a:p>
@@ -15208,8 +15501,47 @@
         </p:nvSpPr>
         <p:spPr>
           <a:xfrm>
-            <a:off x="4069080" y="1783080"/>
-            <a:ext cx="7802575" cy="4663440"/>
+            <a:off x="4069080" y="1737360"/>
+            <a:ext cx="7802575" cy="457200"/>
+          </a:xfrm>
+          <a:prstGeom prst="rect">
+            <a:avLst/>
+          </a:prstGeom>
+          <a:noFill/>
+          <a:ln/>
+        </p:spPr>
+        <p:txBody>
+          <a:bodyPr wrap="square" lIns="0" tIns="0" rIns="0" bIns="0" rtlCol="0" anchor="ctr"/>
+          <a:lstStyle/>
+          <a:p>
+            <a:pPr algn="l" indent="0" marL="0">
+              <a:buNone/>
+            </a:pPr>
+            <a:r>
+              <a:rPr lang="en-US" sz="3200" b="1" dirty="0">
+                <a:solidFill>
+                  <a:srgbClr val="990011"/>
+                </a:solidFill>
+                <a:latin typeface="Times New Roman" pitchFamily="34" charset="0"/>
+                <a:ea typeface="Times New Roman" pitchFamily="34" charset="-122"/>
+                <a:cs typeface="Times New Roman" pitchFamily="34" charset="-120"/>
+              </a:rPr>
+              <a:t>B) Effects</a:t>
+            </a:r>
+            <a:endParaRPr lang="en-US" sz="3200" dirty="0"/>
+          </a:p>
+        </p:txBody>
+      </p:sp>
+      <p:sp>
+        <p:nvSpPr>
+          <p:cNvPr id="6" name="Text 3"/>
+          <p:cNvSpPr/>
+          <p:nvPr/>
+        </p:nvSpPr>
+        <p:spPr>
+          <a:xfrm>
+            <a:off x="4069080" y="2240280"/>
+            <a:ext cx="7802575" cy="4206240"/>
           </a:xfrm>
           <a:prstGeom prst="rect">
             <a:avLst/>
@@ -15236,7 +15568,7 @@
                 <a:ea typeface="Times New Roman" pitchFamily="34" charset="-122"/>
                 <a:cs typeface="Times New Roman" pitchFamily="34" charset="-120"/>
               </a:rPr>
-              <a:t>The government promotes tourism in the following ways:</a:t>
+              <a:t>Tourism in Cameroon has the following effects:</a:t>
             </a:r>
             <a:endParaRPr lang="en-US" sz="4000" dirty="0"/>
           </a:p>
@@ -15256,7 +15588,7 @@
                 <a:ea typeface="Times New Roman" pitchFamily="34" charset="-122"/>
                 <a:cs typeface="Times New Roman" pitchFamily="34" charset="-120"/>
               </a:rPr>
-              <a:t>Protection of sites: </a:t>
+              <a:t>On the economy: </a:t>
             </a:r>
             <a:pPr algn="l" indent="0" marL="0">
               <a:spcAft>
@@ -15273,7 +15605,7 @@
                 <a:ea typeface="Times New Roman" pitchFamily="34" charset="-122"/>
                 <a:cs typeface="Times New Roman" pitchFamily="34" charset="-120"/>
               </a:rPr>
-              <a:t>National parks and reserves are created and guarded.</a:t>
+              <a:t>It brings foreign currency and jobs.</a:t>
             </a:r>
             <a:endParaRPr lang="en-US" sz="4000" dirty="0"/>
           </a:p>
@@ -15293,7 +15625,7 @@
                 <a:ea typeface="Times New Roman" pitchFamily="34" charset="-122"/>
                 <a:cs typeface="Times New Roman" pitchFamily="34" charset="-120"/>
               </a:rPr>
-              <a:t>Infrastructure: </a:t>
+              <a:t>On the people: </a:t>
             </a:r>
             <a:pPr algn="l" indent="0" marL="0">
               <a:spcAft>
@@ -15310,7 +15642,7 @@
                 <a:ea typeface="Times New Roman" pitchFamily="34" charset="-122"/>
                 <a:cs typeface="Times New Roman" pitchFamily="34" charset="-120"/>
               </a:rPr>
-              <a:t>Roads, airports and hotels are built and improved.</a:t>
+              <a:t>It promotes local crafts but can change cultures.</a:t>
             </a:r>
             <a:endParaRPr lang="en-US" sz="4000" dirty="0"/>
           </a:p>
@@ -15487,7 +15819,7 @@
                 <a:ea typeface="Times New Roman" pitchFamily="34" charset="-122"/>
                 <a:cs typeface="Times New Roman" pitchFamily="34" charset="-120"/>
               </a:rPr>
-              <a:t>3. Government Efforts to Promote Tourism (continued)</a:t>
+              <a:t>2. Problems and Effects of Tourism</a:t>
             </a:r>
             <a:endParaRPr lang="en-US" sz="3600" dirty="0"/>
           </a:p>
@@ -15501,8 +15833,47 @@
         </p:nvSpPr>
         <p:spPr>
           <a:xfrm>
-            <a:off x="5349240" y="1783080"/>
-            <a:ext cx="6522415" cy="4663440"/>
+            <a:off x="5349240" y="1737360"/>
+            <a:ext cx="6522415" cy="457200"/>
+          </a:xfrm>
+          <a:prstGeom prst="rect">
+            <a:avLst/>
+          </a:prstGeom>
+          <a:noFill/>
+          <a:ln/>
+        </p:spPr>
+        <p:txBody>
+          <a:bodyPr wrap="square" lIns="0" tIns="0" rIns="0" bIns="0" rtlCol="0" anchor="ctr"/>
+          <a:lstStyle/>
+          <a:p>
+            <a:pPr algn="l" indent="0" marL="0">
+              <a:buNone/>
+            </a:pPr>
+            <a:r>
+              <a:rPr lang="en-US" sz="3200" b="1" dirty="0">
+                <a:solidFill>
+                  <a:srgbClr val="990011"/>
+                </a:solidFill>
+                <a:latin typeface="Times New Roman" pitchFamily="34" charset="0"/>
+                <a:ea typeface="Times New Roman" pitchFamily="34" charset="-122"/>
+                <a:cs typeface="Times New Roman" pitchFamily="34" charset="-120"/>
+              </a:rPr>
+              <a:t>B) Effects (continued)</a:t>
+            </a:r>
+            <a:endParaRPr lang="en-US" sz="3200" dirty="0"/>
+          </a:p>
+        </p:txBody>
+      </p:sp>
+      <p:sp>
+        <p:nvSpPr>
+          <p:cNvPr id="6" name="Text 3"/>
+          <p:cNvSpPr/>
+          <p:nvPr/>
+        </p:nvSpPr>
+        <p:spPr>
+          <a:xfrm>
+            <a:off x="5349240" y="2240280"/>
+            <a:ext cx="6522415" cy="4206240"/>
           </a:xfrm>
           <a:prstGeom prst="rect">
             <a:avLst/>
@@ -15529,7 +15900,7 @@
                 <a:ea typeface="Times New Roman" pitchFamily="34" charset="-122"/>
                 <a:cs typeface="Times New Roman" pitchFamily="34" charset="-120"/>
               </a:rPr>
-              <a:t>Training and promotion: </a:t>
+              <a:t>On the environment: </a:t>
             </a:r>
             <a:pPr algn="l" indent="0" marL="0">
               <a:spcAft>
@@ -15546,7 +15917,7 @@
                 <a:ea typeface="Times New Roman" pitchFamily="34" charset="-122"/>
                 <a:cs typeface="Times New Roman" pitchFamily="34" charset="-120"/>
               </a:rPr>
-              <a:t>Tourism schools train workers and fairs advertise Cameroon.</a:t>
+              <a:t>It can pollute tourist sites.</a:t>
             </a:r>
             <a:endParaRPr lang="en-US" sz="4000" dirty="0"/>
           </a:p>
@@ -15658,7 +16029,7 @@
                 <a:ea typeface="Calibri" pitchFamily="34" charset="-122"/>
                 <a:cs typeface="Calibri" pitchFamily="34" charset="-120"/>
               </a:rPr>
-              <a:t>FORMATIVE EVALUATION</a:t>
+              <a:t>BOARD SUMMARY</a:t>
             </a:r>
             <a:endParaRPr lang="en-US" sz="1400" dirty="0"/>
           </a:p>
@@ -15681,7 +16052,7 @@
         <p:spPr>
           <a:xfrm>
             <a:off x="0" y="658368"/>
-            <a:ext cx="5120640" cy="5833872"/>
+            <a:ext cx="3840480" cy="5833872"/>
           </a:xfrm>
           <a:prstGeom prst="rect">
             <a:avLst/>
@@ -15696,8 +16067,8 @@
         </p:nvSpPr>
         <p:spPr>
           <a:xfrm>
-            <a:off x="5349240" y="1005840"/>
-            <a:ext cx="6522415" cy="731520"/>
+            <a:off x="4069080" y="1005840"/>
+            <a:ext cx="7802575" cy="731520"/>
           </a:xfrm>
           <a:prstGeom prst="rect">
             <a:avLst/>
@@ -15723,7 +16094,7 @@
                 <a:ea typeface="Times New Roman" pitchFamily="34" charset="-122"/>
                 <a:cs typeface="Times New Roman" pitchFamily="34" charset="-120"/>
               </a:rPr>
-              <a:t>Evaluation 1</a:t>
+              <a:t>3. Government Efforts to Promote Tourism</a:t>
             </a:r>
             <a:endParaRPr lang="en-US" sz="3600" dirty="0"/>
           </a:p>
@@ -15737,8 +16108,8 @@
         </p:nvSpPr>
         <p:spPr>
           <a:xfrm>
-            <a:off x="5349240" y="1783080"/>
-            <a:ext cx="6522415" cy="4663440"/>
+            <a:off x="4069080" y="1783080"/>
+            <a:ext cx="7802575" cy="4663440"/>
           </a:xfrm>
           <a:prstGeom prst="rect">
             <a:avLst/>
@@ -15757,7 +16128,7 @@
               <a:buNone/>
             </a:pPr>
             <a:r>
-              <a:rPr lang="en-US" sz="4000" dirty="0">
+              <a:rPr lang="en-US" sz="4000" i="1" dirty="0">
                 <a:solidFill>
                   <a:srgbClr val="111111"/>
                 </a:solidFill>
@@ -15765,7 +16136,81 @@
                 <a:ea typeface="Times New Roman" pitchFamily="34" charset="-122"/>
                 <a:cs typeface="Times New Roman" pitchFamily="34" charset="-120"/>
               </a:rPr>
-              <a:t>Name and locate two tourist attractions in Cameroon.</a:t>
+              <a:t>The government promotes tourism in the following ways:</a:t>
+            </a:r>
+            <a:endParaRPr lang="en-US" sz="4000" dirty="0"/>
+          </a:p>
+          <a:p>
+            <a:pPr algn="l" indent="0" marL="0">
+              <a:spcAft>
+                <a:spcPts val="800"/>
+              </a:spcAft>
+              <a:buNone/>
+            </a:pPr>
+            <a:r>
+              <a:rPr lang="en-US" sz="4000" b="1" dirty="0">
+                <a:solidFill>
+                  <a:srgbClr val="111111"/>
+                </a:solidFill>
+                <a:latin typeface="Times New Roman" pitchFamily="34" charset="0"/>
+                <a:ea typeface="Times New Roman" pitchFamily="34" charset="-122"/>
+                <a:cs typeface="Times New Roman" pitchFamily="34" charset="-120"/>
+              </a:rPr>
+              <a:t>Protection of sites: </a:t>
+            </a:r>
+            <a:pPr algn="l" indent="0" marL="0">
+              <a:spcAft>
+                <a:spcPts val="800"/>
+              </a:spcAft>
+              <a:buNone/>
+            </a:pPr>
+            <a:r>
+              <a:rPr lang="en-US" sz="4000" dirty="0">
+                <a:solidFill>
+                  <a:srgbClr val="111111"/>
+                </a:solidFill>
+                <a:latin typeface="Times New Roman" pitchFamily="34" charset="0"/>
+                <a:ea typeface="Times New Roman" pitchFamily="34" charset="-122"/>
+                <a:cs typeface="Times New Roman" pitchFamily="34" charset="-120"/>
+              </a:rPr>
+              <a:t>National parks and reserves are created and guarded.</a:t>
+            </a:r>
+            <a:endParaRPr lang="en-US" sz="4000" dirty="0"/>
+          </a:p>
+          <a:p>
+            <a:pPr algn="l" indent="0" marL="0">
+              <a:spcAft>
+                <a:spcPts val="800"/>
+              </a:spcAft>
+              <a:buNone/>
+            </a:pPr>
+            <a:r>
+              <a:rPr lang="en-US" sz="4000" b="1" dirty="0">
+                <a:solidFill>
+                  <a:srgbClr val="111111"/>
+                </a:solidFill>
+                <a:latin typeface="Times New Roman" pitchFamily="34" charset="0"/>
+                <a:ea typeface="Times New Roman" pitchFamily="34" charset="-122"/>
+                <a:cs typeface="Times New Roman" pitchFamily="34" charset="-120"/>
+              </a:rPr>
+              <a:t>Infrastructure: </a:t>
+            </a:r>
+            <a:pPr algn="l" indent="0" marL="0">
+              <a:spcAft>
+                <a:spcPts val="800"/>
+              </a:spcAft>
+              <a:buNone/>
+            </a:pPr>
+            <a:r>
+              <a:rPr lang="en-US" sz="4000" dirty="0">
+                <a:solidFill>
+                  <a:srgbClr val="111111"/>
+                </a:solidFill>
+                <a:latin typeface="Times New Roman" pitchFamily="34" charset="0"/>
+                <a:ea typeface="Times New Roman" pitchFamily="34" charset="-122"/>
+                <a:cs typeface="Times New Roman" pitchFamily="34" charset="-120"/>
+              </a:rPr>
+              <a:t>Roads, airports and hotels are built and improved.</a:t>
             </a:r>
             <a:endParaRPr lang="en-US" sz="4000" dirty="0"/>
           </a:p>
@@ -15877,7 +16322,7 @@
                 <a:ea typeface="Calibri" pitchFamily="34" charset="-122"/>
                 <a:cs typeface="Calibri" pitchFamily="34" charset="-120"/>
               </a:rPr>
-              <a:t>FORMATIVE EVALUATION</a:t>
+              <a:t>BOARD SUMMARY</a:t>
             </a:r>
             <a:endParaRPr lang="en-US" sz="1400" dirty="0"/>
           </a:p>
@@ -15942,7 +16387,7 @@
                 <a:ea typeface="Times New Roman" pitchFamily="34" charset="-122"/>
                 <a:cs typeface="Times New Roman" pitchFamily="34" charset="-120"/>
               </a:rPr>
-              <a:t>Expected Answer</a:t>
+              <a:t>3. Government Efforts to Promote Tourism (continued)</a:t>
             </a:r>
             <a:endParaRPr lang="en-US" sz="3600" dirty="0"/>
           </a:p>
@@ -15976,7 +16421,7 @@
               <a:buNone/>
             </a:pPr>
             <a:r>
-              <a:rPr lang="en-US" sz="4000" dirty="0">
+              <a:rPr lang="en-US" sz="4000" b="1" dirty="0">
                 <a:solidFill>
                   <a:srgbClr val="111111"/>
                 </a:solidFill>
@@ -15984,7 +16429,24 @@
                 <a:ea typeface="Times New Roman" pitchFamily="34" charset="-122"/>
                 <a:cs typeface="Times New Roman" pitchFamily="34" charset="-120"/>
               </a:rPr>
-              <a:t>Waza Park (Far North) and Kribi beaches (South).</a:t>
+              <a:t>Training and promotion: </a:t>
+            </a:r>
+            <a:pPr algn="l" indent="0" marL="0">
+              <a:spcAft>
+                <a:spcPts val="800"/>
+              </a:spcAft>
+              <a:buNone/>
+            </a:pPr>
+            <a:r>
+              <a:rPr lang="en-US" sz="4000" dirty="0">
+                <a:solidFill>
+                  <a:srgbClr val="111111"/>
+                </a:solidFill>
+                <a:latin typeface="Times New Roman" pitchFamily="34" charset="0"/>
+                <a:ea typeface="Times New Roman" pitchFamily="34" charset="-122"/>
+                <a:cs typeface="Times New Roman" pitchFamily="34" charset="-120"/>
+              </a:rPr>
+              <a:t>Tourism schools train workers and fairs advertise Cameroon.</a:t>
             </a:r>
             <a:endParaRPr lang="en-US" sz="4000" dirty="0"/>
           </a:p>
@@ -16161,7 +16623,7 @@
                 <a:ea typeface="Times New Roman" pitchFamily="34" charset="-122"/>
                 <a:cs typeface="Times New Roman" pitchFamily="34" charset="-120"/>
               </a:rPr>
-              <a:t>Evaluation 2</a:t>
+              <a:t>Evaluation 1</a:t>
             </a:r>
             <a:endParaRPr lang="en-US" sz="3600" dirty="0"/>
           </a:p>
@@ -16203,7 +16665,7 @@
                 <a:ea typeface="Times New Roman" pitchFamily="34" charset="-122"/>
                 <a:cs typeface="Times New Roman" pitchFamily="34" charset="-120"/>
               </a:rPr>
-              <a:t>Give two problems of tourism in Cameroon.</a:t>
+              <a:t>Name and locate two tourist attractions in Cameroon.</a:t>
             </a:r>
             <a:endParaRPr lang="en-US" sz="4000" dirty="0"/>
           </a:p>
@@ -16422,7 +16884,7 @@
                 <a:ea typeface="Times New Roman" pitchFamily="34" charset="-122"/>
                 <a:cs typeface="Times New Roman" pitchFamily="34" charset="-120"/>
               </a:rPr>
-              <a:t>Bad roads and insecurity.</a:t>
+              <a:t>Waza Park (Far North) and Kribi beaches (South).</a:t>
             </a:r>
             <a:endParaRPr lang="en-US" sz="4000" dirty="0"/>
           </a:p>
@@ -16534,7 +16996,7 @@
                 <a:ea typeface="Calibri" pitchFamily="34" charset="-122"/>
                 <a:cs typeface="Calibri" pitchFamily="34" charset="-120"/>
               </a:rPr>
-              <a:t>REMEDIATION</a:t>
+              <a:t>FORMATIVE EVALUATION</a:t>
             </a:r>
             <a:endParaRPr lang="en-US" sz="1400" dirty="0"/>
           </a:p>
@@ -16557,7 +17019,7 @@
         <p:spPr>
           <a:xfrm>
             <a:off x="0" y="658368"/>
-            <a:ext cx="3840480" cy="5833872"/>
+            <a:ext cx="5120640" cy="5833872"/>
           </a:xfrm>
           <a:prstGeom prst="rect">
             <a:avLst/>
@@ -16572,8 +17034,8 @@
         </p:nvSpPr>
         <p:spPr>
           <a:xfrm>
-            <a:off x="4069080" y="1005840"/>
-            <a:ext cx="7802575" cy="731520"/>
+            <a:off x="5349240" y="1005840"/>
+            <a:ext cx="6522415" cy="731520"/>
           </a:xfrm>
           <a:prstGeom prst="rect">
             <a:avLst/>
@@ -16599,7 +17061,7 @@
                 <a:ea typeface="Times New Roman" pitchFamily="34" charset="-122"/>
                 <a:cs typeface="Times New Roman" pitchFamily="34" charset="-120"/>
               </a:rPr>
-              <a:t>Remediation</a:t>
+              <a:t>Evaluation 2</a:t>
             </a:r>
             <a:endParaRPr lang="en-US" sz="3600" dirty="0"/>
           </a:p>
@@ -16613,8 +17075,8 @@
         </p:nvSpPr>
         <p:spPr>
           <a:xfrm>
-            <a:off x="4069080" y="1783080"/>
-            <a:ext cx="7802575" cy="4663440"/>
+            <a:off x="5349240" y="1783080"/>
+            <a:ext cx="6522415" cy="4663440"/>
           </a:xfrm>
           <a:prstGeom prst="rect">
             <a:avLst/>
@@ -16633,7 +17095,7 @@
               <a:buNone/>
             </a:pPr>
             <a:r>
-              <a:rPr lang="en-US" sz="4000" b="1" dirty="0">
+              <a:rPr lang="en-US" sz="4000" dirty="0">
                 <a:solidFill>
                   <a:srgbClr val="111111"/>
                 </a:solidFill>
@@ -16641,73 +17103,7 @@
                 <a:ea typeface="Times New Roman" pitchFamily="34" charset="-122"/>
                 <a:cs typeface="Times New Roman" pitchFamily="34" charset="-120"/>
               </a:rPr>
-              <a:t>Fill in the blanks:</a:t>
-            </a:r>
-            <a:endParaRPr lang="en-US" sz="4000" dirty="0"/>
-          </a:p>
-          <a:p>
-            <a:pPr algn="l" marL="342900" indent="-342900">
-              <a:spcAft>
-                <a:spcPts val="800"/>
-              </a:spcAft>
-              <a:buSzPct val="100000"/>
-              <a:buFont typeface="+mj-lt"/>
-              <a:buAutoNum type="arabicPeriod" startAt="1"/>
-            </a:pPr>
-            <a:r>
-              <a:rPr lang="en-US" sz="4000" dirty="0">
-                <a:solidFill>
-                  <a:srgbClr val="111111"/>
-                </a:solidFill>
-                <a:latin typeface="Times New Roman" pitchFamily="34" charset="0"/>
-                <a:ea typeface="Times New Roman" pitchFamily="34" charset="-122"/>
-                <a:cs typeface="Times New Roman" pitchFamily="34" charset="-120"/>
-              </a:rPr>
-              <a:t>Cameroon is called Africa in ______.</a:t>
-            </a:r>
-            <a:endParaRPr lang="en-US" sz="4000" dirty="0"/>
-          </a:p>
-          <a:p>
-            <a:pPr algn="l" marL="342900" indent="-342900">
-              <a:spcAft>
-                <a:spcPts val="800"/>
-              </a:spcAft>
-              <a:buSzPct val="100000"/>
-              <a:buFont typeface="+mj-lt"/>
-              <a:buAutoNum type="arabicPeriod" startAt="1"/>
-            </a:pPr>
-            <a:r>
-              <a:rPr lang="en-US" sz="4000" dirty="0">
-                <a:solidFill>
-                  <a:srgbClr val="111111"/>
-                </a:solidFill>
-                <a:latin typeface="Times New Roman" pitchFamily="34" charset="0"/>
-                <a:ea typeface="Times New Roman" pitchFamily="34" charset="-122"/>
-                <a:cs typeface="Times New Roman" pitchFamily="34" charset="-120"/>
-              </a:rPr>
-              <a:t>The famous palace in the West is at ______.</a:t>
-            </a:r>
-            <a:endParaRPr lang="en-US" sz="4000" dirty="0"/>
-          </a:p>
-          <a:p>
-            <a:pPr algn="l" marL="342900" indent="-342900">
-              <a:spcAft>
-                <a:spcPts val="800"/>
-              </a:spcAft>
-              <a:buSzPct val="100000"/>
-              <a:buFont typeface="+mj-lt"/>
-              <a:buAutoNum type="arabicPeriod" startAt="1"/>
-            </a:pPr>
-            <a:r>
-              <a:rPr lang="en-US" sz="4000" dirty="0">
-                <a:solidFill>
-                  <a:srgbClr val="111111"/>
-                </a:solidFill>
-                <a:latin typeface="Times New Roman" pitchFamily="34" charset="0"/>
-                <a:ea typeface="Times New Roman" pitchFamily="34" charset="-122"/>
-                <a:cs typeface="Times New Roman" pitchFamily="34" charset="-120"/>
-              </a:rPr>
-              <a:t>The Lobé Falls are near ______.</a:t>
+              <a:t>Give two problems of tourism in Cameroon.</a:t>
             </a:r>
             <a:endParaRPr lang="en-US" sz="4000" dirty="0"/>
           </a:p>
@@ -16819,7 +17215,7 @@
                 <a:ea typeface="Calibri" pitchFamily="34" charset="-122"/>
                 <a:cs typeface="Calibri" pitchFamily="34" charset="-120"/>
               </a:rPr>
-              <a:t>HOMEWORK</a:t>
+              <a:t>FORMATIVE EVALUATION</a:t>
             </a:r>
             <a:endParaRPr lang="en-US" sz="1400" dirty="0"/>
           </a:p>
@@ -16884,7 +17280,7 @@
                 <a:ea typeface="Times New Roman" pitchFamily="34" charset="-122"/>
                 <a:cs typeface="Times New Roman" pitchFamily="34" charset="-120"/>
               </a:rPr>
-              <a:t>Homework</a:t>
+              <a:t>Expected Answer</a:t>
             </a:r>
             <a:endParaRPr lang="en-US" sz="3600" dirty="0"/>
           </a:p>
@@ -16926,7 +17322,7 @@
                 <a:ea typeface="Times New Roman" pitchFamily="34" charset="-122"/>
                 <a:cs typeface="Times New Roman" pitchFamily="34" charset="-120"/>
               </a:rPr>
-              <a:t>Draw a sketch map of Cameroon showing six tourist attractions.</a:t>
+              <a:t>Bad roads and insecurity.</a:t>
             </a:r>
             <a:endParaRPr lang="en-US" sz="4000" dirty="0"/>
           </a:p>
@@ -17038,7 +17434,7 @@
                 <a:ea typeface="Calibri" pitchFamily="34" charset="-122"/>
                 <a:cs typeface="Calibri" pitchFamily="34" charset="-120"/>
               </a:rPr>
-              <a:t>NEXT LESSON</a:t>
+              <a:t>REMEDIATION</a:t>
             </a:r>
             <a:endParaRPr lang="en-US" sz="1400" dirty="0"/>
           </a:p>
@@ -17061,7 +17457,7 @@
         <p:spPr>
           <a:xfrm>
             <a:off x="0" y="658368"/>
-            <a:ext cx="5120640" cy="5833872"/>
+            <a:ext cx="3840480" cy="5833872"/>
           </a:xfrm>
           <a:prstGeom prst="rect">
             <a:avLst/>
@@ -17076,8 +17472,8 @@
         </p:nvSpPr>
         <p:spPr>
           <a:xfrm>
-            <a:off x="5349240" y="1005840"/>
-            <a:ext cx="6522415" cy="731520"/>
+            <a:off x="4069080" y="1005840"/>
+            <a:ext cx="7802575" cy="731520"/>
           </a:xfrm>
           <a:prstGeom prst="rect">
             <a:avLst/>
@@ -17103,7 +17499,7 @@
                 <a:ea typeface="Times New Roman" pitchFamily="34" charset="-122"/>
                 <a:cs typeface="Times New Roman" pitchFamily="34" charset="-120"/>
               </a:rPr>
-              <a:t>Next Lesson</a:t>
+              <a:t>Remediation</a:t>
             </a:r>
             <a:endParaRPr lang="en-US" sz="3600" dirty="0"/>
           </a:p>
@@ -17117,8 +17513,8 @@
         </p:nvSpPr>
         <p:spPr>
           <a:xfrm>
-            <a:off x="5349240" y="1783080"/>
-            <a:ext cx="6522415" cy="4663440"/>
+            <a:off x="4069080" y="1783080"/>
+            <a:ext cx="7802575" cy="4663440"/>
           </a:xfrm>
           <a:prstGeom prst="rect">
             <a:avLst/>
@@ -17127,10 +17523,10 @@
           <a:ln/>
         </p:spPr>
         <p:txBody>
-          <a:bodyPr wrap="square" lIns="0" tIns="0" rIns="0" bIns="0" rtlCol="0" anchor="ctr"/>
-          <a:lstStyle/>
-          <a:p>
-            <a:pPr algn="ctr" indent="0" marL="0">
+          <a:bodyPr wrap="square" lIns="0" tIns="0" rIns="0" bIns="0" rtlCol="0" anchor="t"/>
+          <a:lstStyle/>
+          <a:p>
+            <a:pPr algn="l" indent="0" marL="0">
               <a:spcAft>
                 <a:spcPts val="800"/>
               </a:spcAft>
@@ -17145,27 +17541,73 @@
                 <a:ea typeface="Times New Roman" pitchFamily="34" charset="-122"/>
                 <a:cs typeface="Times New Roman" pitchFamily="34" charset="-120"/>
               </a:rPr>
-              <a:t>Our next lesson will be on:</a:t>
+              <a:t>Fill in the blanks:</a:t>
             </a:r>
             <a:endParaRPr lang="en-US" sz="4000" dirty="0"/>
           </a:p>
           <a:p>
-            <a:pPr algn="ctr" indent="0" marL="0">
+            <a:pPr algn="l" marL="342900" indent="-342900">
               <a:spcAft>
                 <a:spcPts val="800"/>
               </a:spcAft>
-              <a:buNone/>
+              <a:buSzPct val="100000"/>
+              <a:buFont typeface="+mj-lt"/>
+              <a:buAutoNum type="arabicPeriod" startAt="1"/>
             </a:pPr>
             <a:r>
-              <a:rPr lang="en-US" sz="4000" b="1" dirty="0">
-                <a:solidFill>
-                  <a:srgbClr val="990011"/>
+              <a:rPr lang="en-US" sz="4000" dirty="0">
+                <a:solidFill>
+                  <a:srgbClr val="111111"/>
                 </a:solidFill>
                 <a:latin typeface="Times New Roman" pitchFamily="34" charset="0"/>
                 <a:ea typeface="Times New Roman" pitchFamily="34" charset="-122"/>
                 <a:cs typeface="Times New Roman" pitchFamily="34" charset="-120"/>
               </a:rPr>
-              <a:t>Lesson 22: Economic Growth of Cameroon</a:t>
+              <a:t>Cameroon is called Africa in ______.</a:t>
+            </a:r>
+            <a:endParaRPr lang="en-US" sz="4000" dirty="0"/>
+          </a:p>
+          <a:p>
+            <a:pPr algn="l" marL="342900" indent="-342900">
+              <a:spcAft>
+                <a:spcPts val="800"/>
+              </a:spcAft>
+              <a:buSzPct val="100000"/>
+              <a:buFont typeface="+mj-lt"/>
+              <a:buAutoNum type="arabicPeriod" startAt="1"/>
+            </a:pPr>
+            <a:r>
+              <a:rPr lang="en-US" sz="4000" dirty="0">
+                <a:solidFill>
+                  <a:srgbClr val="111111"/>
+                </a:solidFill>
+                <a:latin typeface="Times New Roman" pitchFamily="34" charset="0"/>
+                <a:ea typeface="Times New Roman" pitchFamily="34" charset="-122"/>
+                <a:cs typeface="Times New Roman" pitchFamily="34" charset="-120"/>
+              </a:rPr>
+              <a:t>The famous palace in the West is at ______.</a:t>
+            </a:r>
+            <a:endParaRPr lang="en-US" sz="4000" dirty="0"/>
+          </a:p>
+          <a:p>
+            <a:pPr algn="l" marL="342900" indent="-342900">
+              <a:spcAft>
+                <a:spcPts val="800"/>
+              </a:spcAft>
+              <a:buSzPct val="100000"/>
+              <a:buFont typeface="+mj-lt"/>
+              <a:buAutoNum type="arabicPeriod" startAt="1"/>
+            </a:pPr>
+            <a:r>
+              <a:rPr lang="en-US" sz="4000" dirty="0">
+                <a:solidFill>
+                  <a:srgbClr val="111111"/>
+                </a:solidFill>
+                <a:latin typeface="Times New Roman" pitchFamily="34" charset="0"/>
+                <a:ea typeface="Times New Roman" pitchFamily="34" charset="-122"/>
+                <a:cs typeface="Times New Roman" pitchFamily="34" charset="-120"/>
+              </a:rPr>
+              <a:t>The Lobé Falls are near ______.</a:t>
             </a:r>
             <a:endParaRPr lang="en-US" sz="4000" dirty="0"/>
           </a:p>
@@ -17277,6 +17719,683 @@
                 <a:ea typeface="Calibri" pitchFamily="34" charset="-122"/>
                 <a:cs typeface="Calibri" pitchFamily="34" charset="-120"/>
               </a:rPr>
+              <a:t>HOMEWORK</a:t>
+            </a:r>
+            <a:endParaRPr lang="en-US" sz="1400" dirty="0"/>
+          </a:p>
+        </p:txBody>
+      </p:sp>
+      <p:pic>
+        <p:nvPicPr>
+          <p:cNvPr id="3" name="Image 0" descr="/home/claude/f4/img/minesec_sheet.png">    </p:cNvPr>
+          <p:cNvPicPr>
+            <a:picLocks noChangeAspect="1"/>
+          </p:cNvPicPr>
+          <p:nvPr/>
+        </p:nvPicPr>
+        <p:blipFill>
+          <a:blip r:embed="rId1"/>
+          <a:stretch>
+            <a:fillRect/>
+          </a:stretch>
+        </p:blipFill>
+        <p:spPr>
+          <a:xfrm>
+            <a:off x="0" y="658368"/>
+            <a:ext cx="5120640" cy="5833872"/>
+          </a:xfrm>
+          <a:prstGeom prst="rect">
+            <a:avLst/>
+          </a:prstGeom>
+        </p:spPr>
+      </p:pic>
+      <p:sp>
+        <p:nvSpPr>
+          <p:cNvPr id="4" name="Text 1"/>
+          <p:cNvSpPr/>
+          <p:nvPr/>
+        </p:nvSpPr>
+        <p:spPr>
+          <a:xfrm>
+            <a:off x="5349240" y="1005840"/>
+            <a:ext cx="6522415" cy="731520"/>
+          </a:xfrm>
+          <a:prstGeom prst="rect">
+            <a:avLst/>
+          </a:prstGeom>
+          <a:noFill/>
+          <a:ln/>
+        </p:spPr>
+        <p:txBody>
+          <a:bodyPr wrap="square" lIns="0" tIns="0" rIns="0" bIns="0" rtlCol="0" anchor="ctr">
+            <a:normAutofit/>
+          </a:bodyPr>
+          <a:lstStyle/>
+          <a:p>
+            <a:pPr algn="ctr" indent="0" marL="0">
+              <a:buNone/>
+            </a:pPr>
+            <a:r>
+              <a:rPr lang="en-US" sz="3600" b="1" dirty="0">
+                <a:solidFill>
+                  <a:srgbClr val="990011"/>
+                </a:solidFill>
+                <a:latin typeface="Times New Roman" pitchFamily="34" charset="0"/>
+                <a:ea typeface="Times New Roman" pitchFamily="34" charset="-122"/>
+                <a:cs typeface="Times New Roman" pitchFamily="34" charset="-120"/>
+              </a:rPr>
+              <a:t>Homework</a:t>
+            </a:r>
+            <a:endParaRPr lang="en-US" sz="3600" dirty="0"/>
+          </a:p>
+        </p:txBody>
+      </p:sp>
+      <p:sp>
+        <p:nvSpPr>
+          <p:cNvPr id="5" name="Text 2"/>
+          <p:cNvSpPr/>
+          <p:nvPr/>
+        </p:nvSpPr>
+        <p:spPr>
+          <a:xfrm>
+            <a:off x="5349240" y="1783080"/>
+            <a:ext cx="6522415" cy="4663440"/>
+          </a:xfrm>
+          <a:prstGeom prst="rect">
+            <a:avLst/>
+          </a:prstGeom>
+          <a:noFill/>
+          <a:ln/>
+        </p:spPr>
+        <p:txBody>
+          <a:bodyPr wrap="square" lIns="0" tIns="0" rIns="0" bIns="0" rtlCol="0" anchor="t"/>
+          <a:lstStyle/>
+          <a:p>
+            <a:pPr algn="l" indent="0" marL="0">
+              <a:spcAft>
+                <a:spcPts val="800"/>
+              </a:spcAft>
+              <a:buNone/>
+            </a:pPr>
+            <a:r>
+              <a:rPr lang="en-US" sz="4000" dirty="0">
+                <a:solidFill>
+                  <a:srgbClr val="111111"/>
+                </a:solidFill>
+                <a:latin typeface="Times New Roman" pitchFamily="34" charset="0"/>
+                <a:ea typeface="Times New Roman" pitchFamily="34" charset="-122"/>
+                <a:cs typeface="Times New Roman" pitchFamily="34" charset="-120"/>
+              </a:rPr>
+              <a:t>Draw a sketch map of Cameroon showing six tourist attractions.</a:t>
+            </a:r>
+            <a:endParaRPr lang="en-US" sz="4000" dirty="0"/>
+          </a:p>
+        </p:txBody>
+      </p:sp>
+      <p:sp>
+        <p:nvSpPr>
+          <p:cNvPr id="25" name="Slide Number Placeholder 0"/>
+          <p:cNvSpPr>
+            <a:spLocks noGrp="1"/>
+          </p:cNvSpPr>
+          <p:nvPr>
+            <p:ph type="sldNum" sz="quarter" idx="4294967295"/>
+          </p:nvPr>
+        </p:nvSpPr>
+        <p:spPr>
+          <a:xfrm>
+            <a:off x="27432" y="91440"/>
+            <a:ext cx="585216" cy="475488"/>
+          </a:xfrm>
+          <a:prstGeom prst="rect">
+            <a:avLst/>
+          </a:prstGeom>
+          <a:extLst>
+            <a:ext uri="{C572A759-6A51-4108-AA02-DFA0A04FC94B}">
+              <ma14:wrappingTextBoxFlag xmlns:ma14="http://schemas.microsoft.com/office/mac/drawingml/2011/main" val="0"/>
+            </a:ext>
+          </a:extLst>
+        </p:spPr>
+        <p:txBody>
+          <a:bodyPr/>
+          <a:lstStyle>
+            <a:lvl1pPr>
+              <a:defRPr sz="2000">
+                <a:solidFill>
+                  <a:srgbClr val="FFFFFF"/>
+                </a:solidFill>
+                <a:latin typeface="Calibri"/>
+                <a:ea typeface="Calibri"/>
+                <a:cs typeface="Calibri"/>
+              </a:defRPr>
+            </a:lvl1pPr>
+          </a:lstStyle>
+          <a:p>
+            <a:pPr algn="ctr"/>
+            <a:fld id="{F7021451-1387-4CA6-816F-3879F97B5CBC}" type="slidenum">
+              <a:rPr b="1" lang="en-US"/>
+              <a:t>49</a:t>
+            </a:fld>
+            <a:endParaRPr lang="en-US"/>
+          </a:p>
+        </p:txBody>
+      </p:sp>
+    </p:spTree>
+  </p:cSld>
+  <p:clrMapOvr>
+    <a:masterClrMapping/>
+  </p:clrMapOvr>
+</p:sld>
+</file>
+
+<file path=ppt/slides/slide5.xml><?xml version="1.0" encoding="utf-8"?>
+<p:sld xmlns:a="http://schemas.openxmlformats.org/drawingml/2006/main" xmlns:r="http://schemas.openxmlformats.org/officeDocument/2006/relationships" xmlns:p="http://schemas.openxmlformats.org/presentationml/2006/main">
+  <p:cSld name="Slide 5">
+    <p:spTree>
+      <p:nvGrpSpPr>
+        <p:cNvPr id="1" name=""/>
+        <p:cNvGrpSpPr/>
+        <p:nvPr/>
+      </p:nvGrpSpPr>
+      <p:grpSpPr>
+        <a:xfrm>
+          <a:off x="0" y="0"/>
+          <a:ext cx="0" cy="0"/>
+          <a:chOff x="0" y="0"/>
+          <a:chExt cx="0" cy="0"/>
+        </a:xfrm>
+      </p:grpSpPr>
+      <p:sp>
+        <p:nvSpPr>
+          <p:cNvPr id="2" name="Text 0"/>
+          <p:cNvSpPr/>
+          <p:nvPr/>
+        </p:nvSpPr>
+        <p:spPr>
+          <a:xfrm>
+            <a:off x="457200" y="713232"/>
+            <a:ext cx="11368735" cy="274320"/>
+          </a:xfrm>
+          <a:prstGeom prst="rect">
+            <a:avLst/>
+          </a:prstGeom>
+          <a:noFill/>
+          <a:ln/>
+        </p:spPr>
+        <p:txBody>
+          <a:bodyPr wrap="square" lIns="0" tIns="0" rIns="0" bIns="0" rtlCol="0" anchor="ctr"/>
+          <a:lstStyle/>
+          <a:p>
+            <a:pPr algn="r" indent="0" marL="0">
+              <a:buNone/>
+            </a:pPr>
+            <a:r>
+              <a:rPr lang="en-US" sz="1400" b="1" dirty="0">
+                <a:solidFill>
+                  <a:srgbClr val="1C3F6E"/>
+                </a:solidFill>
+                <a:latin typeface="Calibri" pitchFamily="34" charset="0"/>
+                <a:ea typeface="Calibri" pitchFamily="34" charset="-122"/>
+                <a:cs typeface="Calibri" pitchFamily="34" charset="-120"/>
+              </a:rPr>
+              <a:t>HOMEWORK CORRECTION</a:t>
+            </a:r>
+            <a:endParaRPr lang="en-US" sz="1400" dirty="0"/>
+          </a:p>
+        </p:txBody>
+      </p:sp>
+      <p:pic>
+        <p:nvPicPr>
+          <p:cNvPr id="3" name="Image 0" descr="/home/claude/f4/img/minesec_sheet.png">    </p:cNvPr>
+          <p:cNvPicPr>
+            <a:picLocks noChangeAspect="1"/>
+          </p:cNvPicPr>
+          <p:nvPr/>
+        </p:nvPicPr>
+        <p:blipFill>
+          <a:blip r:embed="rId1"/>
+          <a:stretch>
+            <a:fillRect/>
+          </a:stretch>
+        </p:blipFill>
+        <p:spPr>
+          <a:xfrm>
+            <a:off x="0" y="658368"/>
+            <a:ext cx="5120640" cy="5833872"/>
+          </a:xfrm>
+          <a:prstGeom prst="rect">
+            <a:avLst/>
+          </a:prstGeom>
+        </p:spPr>
+      </p:pic>
+      <p:sp>
+        <p:nvSpPr>
+          <p:cNvPr id="4" name="Text 1"/>
+          <p:cNvSpPr/>
+          <p:nvPr/>
+        </p:nvSpPr>
+        <p:spPr>
+          <a:xfrm>
+            <a:off x="5349240" y="1005840"/>
+            <a:ext cx="6522415" cy="731520"/>
+          </a:xfrm>
+          <a:prstGeom prst="rect">
+            <a:avLst/>
+          </a:prstGeom>
+          <a:noFill/>
+          <a:ln/>
+        </p:spPr>
+        <p:txBody>
+          <a:bodyPr wrap="square" lIns="0" tIns="0" rIns="0" bIns="0" rtlCol="0" anchor="ctr">
+            <a:normAutofit/>
+          </a:bodyPr>
+          <a:lstStyle/>
+          <a:p>
+            <a:pPr algn="ctr" indent="0" marL="0">
+              <a:buNone/>
+            </a:pPr>
+            <a:r>
+              <a:rPr lang="en-US" sz="3600" b="1" dirty="0">
+                <a:solidFill>
+                  <a:srgbClr val="990011"/>
+                </a:solidFill>
+                <a:latin typeface="Times New Roman" pitchFamily="34" charset="0"/>
+                <a:ea typeface="Times New Roman" pitchFamily="34" charset="-122"/>
+                <a:cs typeface="Times New Roman" pitchFamily="34" charset="-120"/>
+              </a:rPr>
+              <a:t>Correction: Possible Answer</a:t>
+            </a:r>
+            <a:endParaRPr lang="en-US" sz="3600" dirty="0"/>
+          </a:p>
+        </p:txBody>
+      </p:sp>
+      <p:sp>
+        <p:nvSpPr>
+          <p:cNvPr id="5" name="Text 2"/>
+          <p:cNvSpPr/>
+          <p:nvPr/>
+        </p:nvSpPr>
+        <p:spPr>
+          <a:xfrm>
+            <a:off x="5349240" y="1783080"/>
+            <a:ext cx="6522415" cy="4663440"/>
+          </a:xfrm>
+          <a:prstGeom prst="rect">
+            <a:avLst/>
+          </a:prstGeom>
+          <a:noFill/>
+          <a:ln/>
+        </p:spPr>
+        <p:txBody>
+          <a:bodyPr wrap="square" lIns="0" tIns="0" rIns="0" bIns="0" rtlCol="0" anchor="t"/>
+          <a:lstStyle/>
+          <a:p>
+            <a:pPr algn="l" indent="0" marL="0">
+              <a:spcAft>
+                <a:spcPts val="800"/>
+              </a:spcAft>
+              <a:buNone/>
+            </a:pPr>
+            <a:r>
+              <a:rPr lang="en-US" sz="4000" dirty="0">
+                <a:solidFill>
+                  <a:srgbClr val="111111"/>
+                </a:solidFill>
+                <a:latin typeface="Times New Roman" pitchFamily="34" charset="0"/>
+                <a:ea typeface="Times New Roman" pitchFamily="34" charset="-122"/>
+                <a:cs typeface="Times New Roman" pitchFamily="34" charset="-120"/>
+              </a:rPr>
+              <a:t>Positive: jobs in hotels and restaurants, income for fishermen and craftsmen; negative: waste on beaches, rising prices and pressure on the Lobé Falls site.</a:t>
+            </a:r>
+            <a:endParaRPr lang="en-US" sz="4000" dirty="0"/>
+          </a:p>
+        </p:txBody>
+      </p:sp>
+      <p:sp>
+        <p:nvSpPr>
+          <p:cNvPr id="25" name="Slide Number Placeholder 0"/>
+          <p:cNvSpPr>
+            <a:spLocks noGrp="1"/>
+          </p:cNvSpPr>
+          <p:nvPr>
+            <p:ph type="sldNum" sz="quarter" idx="4294967295"/>
+          </p:nvPr>
+        </p:nvSpPr>
+        <p:spPr>
+          <a:xfrm>
+            <a:off x="27432" y="91440"/>
+            <a:ext cx="585216" cy="475488"/>
+          </a:xfrm>
+          <a:prstGeom prst="rect">
+            <a:avLst/>
+          </a:prstGeom>
+          <a:extLst>
+            <a:ext uri="{C572A759-6A51-4108-AA02-DFA0A04FC94B}">
+              <ma14:wrappingTextBoxFlag xmlns:ma14="http://schemas.microsoft.com/office/mac/drawingml/2011/main" val="0"/>
+            </a:ext>
+          </a:extLst>
+        </p:spPr>
+        <p:txBody>
+          <a:bodyPr/>
+          <a:lstStyle>
+            <a:lvl1pPr>
+              <a:defRPr sz="2000">
+                <a:solidFill>
+                  <a:srgbClr val="FFFFFF"/>
+                </a:solidFill>
+                <a:latin typeface="Calibri"/>
+                <a:ea typeface="Calibri"/>
+                <a:cs typeface="Calibri"/>
+              </a:defRPr>
+            </a:lvl1pPr>
+          </a:lstStyle>
+          <a:p>
+            <a:pPr algn="ctr"/>
+            <a:fld id="{F7021451-1387-4CA6-816F-3879F97B5CBC}" type="slidenum">
+              <a:rPr b="1" lang="en-US"/>
+              <a:t>5</a:t>
+            </a:fld>
+            <a:endParaRPr lang="en-US"/>
+          </a:p>
+        </p:txBody>
+      </p:sp>
+    </p:spTree>
+  </p:cSld>
+  <p:clrMapOvr>
+    <a:masterClrMapping/>
+  </p:clrMapOvr>
+</p:sld>
+</file>
+
+<file path=ppt/slides/slide50.xml><?xml version="1.0" encoding="utf-8"?>
+<p:sld xmlns:a="http://schemas.openxmlformats.org/drawingml/2006/main" xmlns:r="http://schemas.openxmlformats.org/officeDocument/2006/relationships" xmlns:p="http://schemas.openxmlformats.org/presentationml/2006/main">
+  <p:cSld name="Slide 50">
+    <p:spTree>
+      <p:nvGrpSpPr>
+        <p:cNvPr id="1" name=""/>
+        <p:cNvGrpSpPr/>
+        <p:nvPr/>
+      </p:nvGrpSpPr>
+      <p:grpSpPr>
+        <a:xfrm>
+          <a:off x="0" y="0"/>
+          <a:ext cx="0" cy="0"/>
+          <a:chOff x="0" y="0"/>
+          <a:chExt cx="0" cy="0"/>
+        </a:xfrm>
+      </p:grpSpPr>
+      <p:sp>
+        <p:nvSpPr>
+          <p:cNvPr id="2" name="Text 0"/>
+          <p:cNvSpPr/>
+          <p:nvPr/>
+        </p:nvSpPr>
+        <p:spPr>
+          <a:xfrm>
+            <a:off x="457200" y="713232"/>
+            <a:ext cx="11368735" cy="274320"/>
+          </a:xfrm>
+          <a:prstGeom prst="rect">
+            <a:avLst/>
+          </a:prstGeom>
+          <a:noFill/>
+          <a:ln/>
+        </p:spPr>
+        <p:txBody>
+          <a:bodyPr wrap="square" lIns="0" tIns="0" rIns="0" bIns="0" rtlCol="0" anchor="ctr"/>
+          <a:lstStyle/>
+          <a:p>
+            <a:pPr algn="r" indent="0" marL="0">
+              <a:buNone/>
+            </a:pPr>
+            <a:r>
+              <a:rPr lang="en-US" sz="1400" b="1" dirty="0">
+                <a:solidFill>
+                  <a:srgbClr val="1C3F6E"/>
+                </a:solidFill>
+                <a:latin typeface="Calibri" pitchFamily="34" charset="0"/>
+                <a:ea typeface="Calibri" pitchFamily="34" charset="-122"/>
+                <a:cs typeface="Calibri" pitchFamily="34" charset="-120"/>
+              </a:rPr>
+              <a:t>NEXT LESSON</a:t>
+            </a:r>
+            <a:endParaRPr lang="en-US" sz="1400" dirty="0"/>
+          </a:p>
+        </p:txBody>
+      </p:sp>
+      <p:pic>
+        <p:nvPicPr>
+          <p:cNvPr id="3" name="Image 0" descr="/home/claude/f4/img/minesec_sheet.png">    </p:cNvPr>
+          <p:cNvPicPr>
+            <a:picLocks noChangeAspect="1"/>
+          </p:cNvPicPr>
+          <p:nvPr/>
+        </p:nvPicPr>
+        <p:blipFill>
+          <a:blip r:embed="rId1"/>
+          <a:stretch>
+            <a:fillRect/>
+          </a:stretch>
+        </p:blipFill>
+        <p:spPr>
+          <a:xfrm>
+            <a:off x="0" y="658368"/>
+            <a:ext cx="5120640" cy="5833872"/>
+          </a:xfrm>
+          <a:prstGeom prst="rect">
+            <a:avLst/>
+          </a:prstGeom>
+        </p:spPr>
+      </p:pic>
+      <p:sp>
+        <p:nvSpPr>
+          <p:cNvPr id="4" name="Text 1"/>
+          <p:cNvSpPr/>
+          <p:nvPr/>
+        </p:nvSpPr>
+        <p:spPr>
+          <a:xfrm>
+            <a:off x="5349240" y="1005840"/>
+            <a:ext cx="6522415" cy="731520"/>
+          </a:xfrm>
+          <a:prstGeom prst="rect">
+            <a:avLst/>
+          </a:prstGeom>
+          <a:noFill/>
+          <a:ln/>
+        </p:spPr>
+        <p:txBody>
+          <a:bodyPr wrap="square" lIns="0" tIns="0" rIns="0" bIns="0" rtlCol="0" anchor="ctr">
+            <a:normAutofit/>
+          </a:bodyPr>
+          <a:lstStyle/>
+          <a:p>
+            <a:pPr algn="ctr" indent="0" marL="0">
+              <a:buNone/>
+            </a:pPr>
+            <a:r>
+              <a:rPr lang="en-US" sz="3600" b="1" dirty="0">
+                <a:solidFill>
+                  <a:srgbClr val="990011"/>
+                </a:solidFill>
+                <a:latin typeface="Times New Roman" pitchFamily="34" charset="0"/>
+                <a:ea typeface="Times New Roman" pitchFamily="34" charset="-122"/>
+                <a:cs typeface="Times New Roman" pitchFamily="34" charset="-120"/>
+              </a:rPr>
+              <a:t>Next Lesson</a:t>
+            </a:r>
+            <a:endParaRPr lang="en-US" sz="3600" dirty="0"/>
+          </a:p>
+        </p:txBody>
+      </p:sp>
+      <p:sp>
+        <p:nvSpPr>
+          <p:cNvPr id="5" name="Text 2"/>
+          <p:cNvSpPr/>
+          <p:nvPr/>
+        </p:nvSpPr>
+        <p:spPr>
+          <a:xfrm>
+            <a:off x="5349240" y="1783080"/>
+            <a:ext cx="6522415" cy="4663440"/>
+          </a:xfrm>
+          <a:prstGeom prst="rect">
+            <a:avLst/>
+          </a:prstGeom>
+          <a:noFill/>
+          <a:ln/>
+        </p:spPr>
+        <p:txBody>
+          <a:bodyPr wrap="square" lIns="0" tIns="0" rIns="0" bIns="0" rtlCol="0" anchor="ctr"/>
+          <a:lstStyle/>
+          <a:p>
+            <a:pPr algn="ctr" indent="0" marL="0">
+              <a:spcAft>
+                <a:spcPts val="800"/>
+              </a:spcAft>
+              <a:buNone/>
+            </a:pPr>
+            <a:r>
+              <a:rPr lang="en-US" sz="4000" b="1" dirty="0">
+                <a:solidFill>
+                  <a:srgbClr val="111111"/>
+                </a:solidFill>
+                <a:latin typeface="Times New Roman" pitchFamily="34" charset="0"/>
+                <a:ea typeface="Times New Roman" pitchFamily="34" charset="-122"/>
+                <a:cs typeface="Times New Roman" pitchFamily="34" charset="-120"/>
+              </a:rPr>
+              <a:t>Our next lesson will be on:</a:t>
+            </a:r>
+            <a:endParaRPr lang="en-US" sz="4000" dirty="0"/>
+          </a:p>
+          <a:p>
+            <a:pPr algn="ctr" indent="0" marL="0">
+              <a:spcAft>
+                <a:spcPts val="800"/>
+              </a:spcAft>
+              <a:buNone/>
+            </a:pPr>
+            <a:r>
+              <a:rPr lang="en-US" sz="4000" b="1" dirty="0">
+                <a:solidFill>
+                  <a:srgbClr val="990011"/>
+                </a:solidFill>
+                <a:latin typeface="Times New Roman" pitchFamily="34" charset="0"/>
+                <a:ea typeface="Times New Roman" pitchFamily="34" charset="-122"/>
+                <a:cs typeface="Times New Roman" pitchFamily="34" charset="-120"/>
+              </a:rPr>
+              <a:t>Lesson 22: Economic Growth of Cameroon</a:t>
+            </a:r>
+            <a:endParaRPr lang="en-US" sz="4000" dirty="0"/>
+          </a:p>
+        </p:txBody>
+      </p:sp>
+      <p:sp>
+        <p:nvSpPr>
+          <p:cNvPr id="25" name="Slide Number Placeholder 0"/>
+          <p:cNvSpPr>
+            <a:spLocks noGrp="1"/>
+          </p:cNvSpPr>
+          <p:nvPr>
+            <p:ph type="sldNum" sz="quarter" idx="4294967295"/>
+          </p:nvPr>
+        </p:nvSpPr>
+        <p:spPr>
+          <a:xfrm>
+            <a:off x="27432" y="91440"/>
+            <a:ext cx="585216" cy="475488"/>
+          </a:xfrm>
+          <a:prstGeom prst="rect">
+            <a:avLst/>
+          </a:prstGeom>
+          <a:extLst>
+            <a:ext uri="{C572A759-6A51-4108-AA02-DFA0A04FC94B}">
+              <ma14:wrappingTextBoxFlag xmlns:ma14="http://schemas.microsoft.com/office/mac/drawingml/2011/main" val="0"/>
+            </a:ext>
+          </a:extLst>
+        </p:spPr>
+        <p:txBody>
+          <a:bodyPr/>
+          <a:lstStyle>
+            <a:lvl1pPr>
+              <a:defRPr sz="2000">
+                <a:solidFill>
+                  <a:srgbClr val="FFFFFF"/>
+                </a:solidFill>
+                <a:latin typeface="Calibri"/>
+                <a:ea typeface="Calibri"/>
+                <a:cs typeface="Calibri"/>
+              </a:defRPr>
+            </a:lvl1pPr>
+          </a:lstStyle>
+          <a:p>
+            <a:pPr algn="ctr"/>
+            <a:fld id="{F7021451-1387-4CA6-816F-3879F97B5CBC}" type="slidenum">
+              <a:rPr b="1" lang="en-US"/>
+              <a:t>50</a:t>
+            </a:fld>
+            <a:endParaRPr lang="en-US"/>
+          </a:p>
+        </p:txBody>
+      </p:sp>
+    </p:spTree>
+  </p:cSld>
+  <p:clrMapOvr>
+    <a:masterClrMapping/>
+  </p:clrMapOvr>
+</p:sld>
+</file>
+
+<file path=ppt/slides/slide51.xml><?xml version="1.0" encoding="utf-8"?>
+<p:sld xmlns:a="http://schemas.openxmlformats.org/drawingml/2006/main" xmlns:r="http://schemas.openxmlformats.org/officeDocument/2006/relationships" xmlns:p="http://schemas.openxmlformats.org/presentationml/2006/main">
+  <p:cSld name="Slide 51">
+    <p:spTree>
+      <p:nvGrpSpPr>
+        <p:cNvPr id="1" name=""/>
+        <p:cNvGrpSpPr/>
+        <p:nvPr/>
+      </p:nvGrpSpPr>
+      <p:grpSpPr>
+        <a:xfrm>
+          <a:off x="0" y="0"/>
+          <a:ext cx="0" cy="0"/>
+          <a:chOff x="0" y="0"/>
+          <a:chExt cx="0" cy="0"/>
+        </a:xfrm>
+      </p:grpSpPr>
+      <p:sp>
+        <p:nvSpPr>
+          <p:cNvPr id="2" name="Text 0"/>
+          <p:cNvSpPr/>
+          <p:nvPr/>
+        </p:nvSpPr>
+        <p:spPr>
+          <a:xfrm>
+            <a:off x="457200" y="713232"/>
+            <a:ext cx="11368735" cy="274320"/>
+          </a:xfrm>
+          <a:prstGeom prst="rect">
+            <a:avLst/>
+          </a:prstGeom>
+          <a:noFill/>
+          <a:ln/>
+        </p:spPr>
+        <p:txBody>
+          <a:bodyPr wrap="square" lIns="0" tIns="0" rIns="0" bIns="0" rtlCol="0" anchor="ctr"/>
+          <a:lstStyle/>
+          <a:p>
+            <a:pPr algn="r" indent="0" marL="0">
+              <a:buNone/>
+            </a:pPr>
+            <a:r>
+              <a:rPr lang="en-US" sz="1400" b="1" dirty="0">
+                <a:solidFill>
+                  <a:srgbClr val="1C3F6E"/>
+                </a:solidFill>
+                <a:latin typeface="Calibri" pitchFamily="34" charset="0"/>
+                <a:ea typeface="Calibri" pitchFamily="34" charset="-122"/>
+                <a:cs typeface="Calibri" pitchFamily="34" charset="-120"/>
+              </a:rPr>
               <a:t>BILINGUAL GAME</a:t>
             </a:r>
             <a:endParaRPr lang="en-US" sz="1400" dirty="0"/>
@@ -17324,7 +18443,7 @@
       </p:sp>
       <p:graphicFrame>
         <p:nvGraphicFramePr>
-          <p:cNvPr id="50" name="Table 0"/>
+          <p:cNvPr id="52" name="Table 0"/>
           <p:cNvGraphicFramePr>
             <a:graphicFrameLocks noGrp="1"/>
           </p:cNvGraphicFramePr>
@@ -18360,7 +19479,7 @@
             <a:pPr algn="ctr"/>
             <a:fld id="{F7021451-1387-4CA6-816F-3879F97B5CBC}" type="slidenum">
               <a:rPr b="1" lang="en-US"/>
-              <a:t>49</a:t>
+              <a:t>51</a:t>
             </a:fld>
             <a:endParaRPr lang="en-US"/>
           </a:p>
@@ -18374,9 +19493,9 @@
 </p:sld>
 </file>
 
-<file path=ppt/slides/slide5.xml><?xml version="1.0" encoding="utf-8"?>
+<file path=ppt/slides/slide52.xml><?xml version="1.0" encoding="utf-8"?>
 <p:sld xmlns:a="http://schemas.openxmlformats.org/drawingml/2006/main" xmlns:r="http://schemas.openxmlformats.org/officeDocument/2006/relationships" xmlns:p="http://schemas.openxmlformats.org/presentationml/2006/main">
-  <p:cSld name="Slide 5">
+  <p:cSld name="Slide 52">
     <p:spTree>
       <p:nvGrpSpPr>
         <p:cNvPr id="1" name=""/>
@@ -18424,225 +19543,6 @@
                 <a:ea typeface="Calibri" pitchFamily="34" charset="-122"/>
                 <a:cs typeface="Calibri" pitchFamily="34" charset="-120"/>
               </a:rPr>
-              <a:t>HOMEWORK CORRECTION</a:t>
-            </a:r>
-            <a:endParaRPr lang="en-US" sz="1400" dirty="0"/>
-          </a:p>
-        </p:txBody>
-      </p:sp>
-      <p:pic>
-        <p:nvPicPr>
-          <p:cNvPr id="3" name="Image 0" descr="/home/claude/f4/img/minesec_sheet.png">    </p:cNvPr>
-          <p:cNvPicPr>
-            <a:picLocks noChangeAspect="1"/>
-          </p:cNvPicPr>
-          <p:nvPr/>
-        </p:nvPicPr>
-        <p:blipFill>
-          <a:blip r:embed="rId1"/>
-          <a:stretch>
-            <a:fillRect/>
-          </a:stretch>
-        </p:blipFill>
-        <p:spPr>
-          <a:xfrm>
-            <a:off x="0" y="658368"/>
-            <a:ext cx="5120640" cy="5833872"/>
-          </a:xfrm>
-          <a:prstGeom prst="rect">
-            <a:avLst/>
-          </a:prstGeom>
-        </p:spPr>
-      </p:pic>
-      <p:sp>
-        <p:nvSpPr>
-          <p:cNvPr id="4" name="Text 1"/>
-          <p:cNvSpPr/>
-          <p:nvPr/>
-        </p:nvSpPr>
-        <p:spPr>
-          <a:xfrm>
-            <a:off x="5349240" y="1005840"/>
-            <a:ext cx="6522415" cy="731520"/>
-          </a:xfrm>
-          <a:prstGeom prst="rect">
-            <a:avLst/>
-          </a:prstGeom>
-          <a:noFill/>
-          <a:ln/>
-        </p:spPr>
-        <p:txBody>
-          <a:bodyPr wrap="square" lIns="0" tIns="0" rIns="0" bIns="0" rtlCol="0" anchor="ctr">
-            <a:normAutofit/>
-          </a:bodyPr>
-          <a:lstStyle/>
-          <a:p>
-            <a:pPr algn="ctr" indent="0" marL="0">
-              <a:buNone/>
-            </a:pPr>
-            <a:r>
-              <a:rPr lang="en-US" sz="3600" b="1" dirty="0">
-                <a:solidFill>
-                  <a:srgbClr val="990011"/>
-                </a:solidFill>
-                <a:latin typeface="Times New Roman" pitchFamily="34" charset="0"/>
-                <a:ea typeface="Times New Roman" pitchFamily="34" charset="-122"/>
-                <a:cs typeface="Times New Roman" pitchFamily="34" charset="-120"/>
-              </a:rPr>
-              <a:t>Correction: Possible Answer</a:t>
-            </a:r>
-            <a:endParaRPr lang="en-US" sz="3600" dirty="0"/>
-          </a:p>
-        </p:txBody>
-      </p:sp>
-      <p:sp>
-        <p:nvSpPr>
-          <p:cNvPr id="5" name="Text 2"/>
-          <p:cNvSpPr/>
-          <p:nvPr/>
-        </p:nvSpPr>
-        <p:spPr>
-          <a:xfrm>
-            <a:off x="5349240" y="1783080"/>
-            <a:ext cx="6522415" cy="4663440"/>
-          </a:xfrm>
-          <a:prstGeom prst="rect">
-            <a:avLst/>
-          </a:prstGeom>
-          <a:noFill/>
-          <a:ln/>
-        </p:spPr>
-        <p:txBody>
-          <a:bodyPr wrap="square" lIns="0" tIns="0" rIns="0" bIns="0" rtlCol="0" anchor="t"/>
-          <a:lstStyle/>
-          <a:p>
-            <a:pPr algn="l" indent="0" marL="0">
-              <a:spcAft>
-                <a:spcPts val="800"/>
-              </a:spcAft>
-              <a:buNone/>
-            </a:pPr>
-            <a:r>
-              <a:rPr lang="en-US" sz="4000" dirty="0">
-                <a:solidFill>
-                  <a:srgbClr val="111111"/>
-                </a:solidFill>
-                <a:latin typeface="Times New Roman" pitchFamily="34" charset="0"/>
-                <a:ea typeface="Times New Roman" pitchFamily="34" charset="-122"/>
-                <a:cs typeface="Times New Roman" pitchFamily="34" charset="-120"/>
-              </a:rPr>
-              <a:t>Positive: jobs in hotels and restaurants, income for fishermen and craftsmen; negative: waste on beaches, rising prices and pressure on the Lobé Falls site.</a:t>
-            </a:r>
-            <a:endParaRPr lang="en-US" sz="4000" dirty="0"/>
-          </a:p>
-        </p:txBody>
-      </p:sp>
-      <p:sp>
-        <p:nvSpPr>
-          <p:cNvPr id="25" name="Slide Number Placeholder 0"/>
-          <p:cNvSpPr>
-            <a:spLocks noGrp="1"/>
-          </p:cNvSpPr>
-          <p:nvPr>
-            <p:ph type="sldNum" sz="quarter" idx="4294967295"/>
-          </p:nvPr>
-        </p:nvSpPr>
-        <p:spPr>
-          <a:xfrm>
-            <a:off x="27432" y="91440"/>
-            <a:ext cx="585216" cy="475488"/>
-          </a:xfrm>
-          <a:prstGeom prst="rect">
-            <a:avLst/>
-          </a:prstGeom>
-          <a:extLst>
-            <a:ext uri="{C572A759-6A51-4108-AA02-DFA0A04FC94B}">
-              <ma14:wrappingTextBoxFlag xmlns:ma14="http://schemas.microsoft.com/office/mac/drawingml/2011/main" val="0"/>
-            </a:ext>
-          </a:extLst>
-        </p:spPr>
-        <p:txBody>
-          <a:bodyPr/>
-          <a:lstStyle>
-            <a:lvl1pPr>
-              <a:defRPr sz="2000">
-                <a:solidFill>
-                  <a:srgbClr val="FFFFFF"/>
-                </a:solidFill>
-                <a:latin typeface="Calibri"/>
-                <a:ea typeface="Calibri"/>
-                <a:cs typeface="Calibri"/>
-              </a:defRPr>
-            </a:lvl1pPr>
-          </a:lstStyle>
-          <a:p>
-            <a:pPr algn="ctr"/>
-            <a:fld id="{F7021451-1387-4CA6-816F-3879F97B5CBC}" type="slidenum">
-              <a:rPr b="1" lang="en-US"/>
-              <a:t>5</a:t>
-            </a:fld>
-            <a:endParaRPr lang="en-US"/>
-          </a:p>
-        </p:txBody>
-      </p:sp>
-    </p:spTree>
-  </p:cSld>
-  <p:clrMapOvr>
-    <a:masterClrMapping/>
-  </p:clrMapOvr>
-</p:sld>
-</file>
-
-<file path=ppt/slides/slide50.xml><?xml version="1.0" encoding="utf-8"?>
-<p:sld xmlns:a="http://schemas.openxmlformats.org/drawingml/2006/main" xmlns:r="http://schemas.openxmlformats.org/officeDocument/2006/relationships" xmlns:p="http://schemas.openxmlformats.org/presentationml/2006/main">
-  <p:cSld name="Slide 50">
-    <p:spTree>
-      <p:nvGrpSpPr>
-        <p:cNvPr id="1" name=""/>
-        <p:cNvGrpSpPr/>
-        <p:nvPr/>
-      </p:nvGrpSpPr>
-      <p:grpSpPr>
-        <a:xfrm>
-          <a:off x="0" y="0"/>
-          <a:ext cx="0" cy="0"/>
-          <a:chOff x="0" y="0"/>
-          <a:chExt cx="0" cy="0"/>
-        </a:xfrm>
-      </p:grpSpPr>
-      <p:sp>
-        <p:nvSpPr>
-          <p:cNvPr id="2" name="Text 0"/>
-          <p:cNvSpPr/>
-          <p:nvPr/>
-        </p:nvSpPr>
-        <p:spPr>
-          <a:xfrm>
-            <a:off x="457200" y="713232"/>
-            <a:ext cx="11368735" cy="274320"/>
-          </a:xfrm>
-          <a:prstGeom prst="rect">
-            <a:avLst/>
-          </a:prstGeom>
-          <a:noFill/>
-          <a:ln/>
-        </p:spPr>
-        <p:txBody>
-          <a:bodyPr wrap="square" lIns="0" tIns="0" rIns="0" bIns="0" rtlCol="0" anchor="ctr"/>
-          <a:lstStyle/>
-          <a:p>
-            <a:pPr algn="r" indent="0" marL="0">
-              <a:buNone/>
-            </a:pPr>
-            <a:r>
-              <a:rPr lang="en-US" sz="1400" b="1" dirty="0">
-                <a:solidFill>
-                  <a:srgbClr val="1C3F6E"/>
-                </a:solidFill>
-                <a:latin typeface="Calibri" pitchFamily="34" charset="0"/>
-                <a:ea typeface="Calibri" pitchFamily="34" charset="-122"/>
-                <a:cs typeface="Calibri" pitchFamily="34" charset="-120"/>
-              </a:rPr>
               <a:t>LOGBOOK</a:t>
             </a:r>
             <a:endParaRPr lang="en-US" sz="1400" dirty="0"/>
@@ -18690,7 +19590,7 @@
       </p:sp>
       <p:graphicFrame>
         <p:nvGraphicFramePr>
-          <p:cNvPr id="51" name="Table 0"/>
+          <p:cNvPr id="53" name="Table 0"/>
           <p:cNvGraphicFramePr>
             <a:graphicFrameLocks noGrp="1"/>
           </p:cNvGraphicFramePr>
@@ -19312,7 +20212,7 @@
             <a:pPr algn="ctr"/>
             <a:fld id="{F7021451-1387-4CA6-816F-3879F97B5CBC}" type="slidenum">
               <a:rPr b="1" lang="en-US"/>
-              <a:t>50</a:t>
+              <a:t>52</a:t>
             </a:fld>
             <a:endParaRPr lang="en-US"/>
           </a:p>
@@ -19326,9 +20226,9 @@
 </p:sld>
 </file>
 
-<file path=ppt/slides/slide51.xml><?xml version="1.0" encoding="utf-8"?>
+<file path=ppt/slides/slide53.xml><?xml version="1.0" encoding="utf-8"?>
 <p:sld xmlns:a="http://schemas.openxmlformats.org/drawingml/2006/main" xmlns:r="http://schemas.openxmlformats.org/officeDocument/2006/relationships" xmlns:p="http://schemas.openxmlformats.org/presentationml/2006/main">
-  <p:cSld name="Slide 51">
+  <p:cSld name="Slide 53">
     <p:spTree>
       <p:nvGrpSpPr>
         <p:cNvPr id="1" name=""/>
@@ -19423,7 +20323,7 @@
       </p:sp>
       <p:graphicFrame>
         <p:nvGraphicFramePr>
-          <p:cNvPr id="52" name="Table 0"/>
+          <p:cNvPr id="54" name="Table 0"/>
           <p:cNvGraphicFramePr>
             <a:graphicFrameLocks noGrp="1"/>
           </p:cNvGraphicFramePr>
@@ -19533,7 +20433,7 @@
                           <a:ea typeface="Calibri" pitchFamily="34" charset="-122"/>
                           <a:cs typeface="Calibri" pitchFamily="34" charset="-120"/>
                         </a:rPr>
-                        <a:t>Identification, Location and Distribution of Attractions; Problems and Effects of Tourism; Government Efforts to Promote Tourism.</a:t>
+                        <a:t>Identification, Location and Distribution of Attractions; Problems; Effects; Government Efforts to Promote Tourism.</a:t>
                       </a:r>
                       <a:endParaRPr lang="en-US" sz="1600" dirty="0">
                         <a:latin typeface="Calibri" charset="0"/>
@@ -20183,7 +21083,7 @@
             <a:pPr algn="ctr"/>
             <a:fld id="{F7021451-1387-4CA6-816F-3879F97B5CBC}" type="slidenum">
               <a:rPr b="1" lang="en-US"/>
-              <a:t>51</a:t>
+              <a:t>53</a:t>
             </a:fld>
             <a:endParaRPr lang="en-US"/>
           </a:p>
@@ -20197,9 +21097,9 @@
 </p:sld>
 </file>
 
-<file path=ppt/slides/slide52.xml><?xml version="1.0" encoding="utf-8"?>
+<file path=ppt/slides/slide54.xml><?xml version="1.0" encoding="utf-8"?>
 <p:sld xmlns:a="http://schemas.openxmlformats.org/drawingml/2006/main" xmlns:r="http://schemas.openxmlformats.org/officeDocument/2006/relationships" xmlns:p="http://schemas.openxmlformats.org/presentationml/2006/main">
-  <p:cSld name="Slide 52">
+  <p:cSld name="Slide 54">
     <p:spTree>
       <p:nvGrpSpPr>
         <p:cNvPr id="1" name=""/>
@@ -20508,7 +21408,7 @@
             <a:pPr algn="ctr"/>
             <a:fld id="{F7021451-1387-4CA6-816F-3879F97B5CBC}" type="slidenum">
               <a:rPr b="1" lang="en-US"/>
-              <a:t>52</a:t>
+              <a:t>54</a:t>
             </a:fld>
             <a:endParaRPr lang="en-US"/>
           </a:p>
@@ -20522,9 +21422,9 @@
 </p:sld>
 </file>
 
-<file path=ppt/slides/slide53.xml><?xml version="1.0" encoding="utf-8"?>
+<file path=ppt/slides/slide55.xml><?xml version="1.0" encoding="utf-8"?>
 <p:sld xmlns:a="http://schemas.openxmlformats.org/drawingml/2006/main" xmlns:r="http://schemas.openxmlformats.org/officeDocument/2006/relationships" xmlns:p="http://schemas.openxmlformats.org/presentationml/2006/main">
-  <p:cSld name="Slide 53">
+  <p:cSld name="Slide 55">
     <p:spTree>
       <p:nvGrpSpPr>
         <p:cNvPr id="1" name=""/>
@@ -20812,7 +21712,7 @@
             <a:pPr algn="ctr"/>
             <a:fld id="{F7021451-1387-4CA6-816F-3879F97B5CBC}" type="slidenum">
               <a:rPr b="1" lang="en-US"/>
-              <a:t>53</a:t>
+              <a:t>55</a:t>
             </a:fld>
             <a:endParaRPr lang="en-US"/>
           </a:p>
